--- a/assets/figures-editable/appendix-studies/a-e05.pptx
+++ b/assets/figures-editable/appendix-studies/a-e05.pptx
@@ -7,7 +7,7 @@
   <p:sldIdLst>
     <p:sldId id="256" r:id="rId7"/>
   </p:sldIdLst>
-  <p:sldSz cx="8961120" cy="5449824" type="screen4x3"/>
+  <p:sldSz cx="12191695" cy="6858000" type="screen4x3"/>
   <p:notesSz cx="6858000" cy="9144000"/>
   <p:defaultTextStyle>
     <a:defPPr>
@@ -3098,14 +3098,14 @@
       <p:grpSpPr/>
       <p:sp>
         <p:nvSpPr>
-          <p:cNvPr id="2" name="text 0" descr="sci-ppt:obj-000"/>
+          <p:cNvPr id="2" name="A-E05 text 0" descr="sci-ppt:o000"/>
           <p:cNvSpPr txBox="1"/>
           <p:nvPr/>
         </p:nvSpPr>
         <p:spPr>
           <a:xfrm>
-            <a:off x="256032" y="137160"/>
-            <a:ext cx="7315200" cy="310896"/>
+            <a:off x="274320" y="118872"/>
+            <a:ext cx="11612880" cy="340105"/>
           </a:xfrm>
           <a:prstGeom prst="rect">
             <a:avLst/>
@@ -3114,7 +3114,7 @@
           <a:effectLst/>
         </p:spPr>
         <p:txBody>
-          <a:bodyPr wrap="none" lIns="0" rIns="0" tIns="0" bIns="0" anchor="ctr">
+          <a:bodyPr wrap="none" lIns="18288" rIns="18288" tIns="18288" bIns="18288" anchor="t">
             <a:spAutoFit/>
           </a:bodyPr>
           <a:lstStyle/>
@@ -3125,113 +3125,115 @@
               </a:spcAft>
             </a:pPr>
             <a:r>
-              <a:rPr sz="1439" b="0" i="0">
+              <a:rPr sz="1900" b="1" i="0">
                 <a:solidFill>
                   <a:srgbClr val="8EDBD4"/>
                 </a:solidFill>
                 <a:latin typeface="Arial"/>
               </a:rPr>
-              <a:t>A-E05 · Physical variable map</a:t>
-            </a:r>
-          </a:p>
-        </p:txBody>
-      </p:sp>
-      <p:sp>
-        <p:nvSpPr>
-          <p:cNvPr id="3" name="ellipse 1" descr="sci-ppt:obj-001"/>
-          <p:cNvSpPr/>
+              <a:t>A-E05 · Derived neo-Hookean elastic resistance</a:t>
+            </a:r>
+          </a:p>
+        </p:txBody>
+      </p:sp>
+      <p:cxnSp>
+        <p:nvCxnSpPr>
+          <p:cNvPr id="3" name="A-E05 line 1" descr="sci-ppt:o001"/>
+          <p:cNvCxnSpPr/>
           <p:nvPr/>
-        </p:nvSpPr>
-        <p:spPr>
-          <a:xfrm>
-            <a:off x="1060704" y="914400"/>
-            <a:ext cx="1463040" cy="1463040"/>
-          </a:xfrm>
-          <a:prstGeom prst="ellipse">
+        </p:nvCxnSpPr>
+        <p:spPr>
+          <a:xfrm>
+            <a:off x="914400" y="5029200"/>
+            <a:ext cx="5852160" cy="0"/>
+          </a:xfrm>
+          <a:prstGeom prst="line">
             <a:avLst/>
           </a:prstGeom>
-          <a:noFill/>
-          <a:ln w="17780">
+          <a:ln w="19050">
             <a:solidFill>
               <a:srgbClr val="B4C7D2"/>
             </a:solidFill>
           </a:ln>
           <a:effectLst/>
         </p:spPr>
-        <p:txBody>
-          <a:bodyPr rtlCol="0" anchor="ctr"/>
-          <a:lstStyle/>
-          <a:p>
-            <a:pPr algn="ctr"/>
-          </a:p>
-        </p:txBody>
-      </p:sp>
-      <p:sp>
-        <p:nvSpPr>
-          <p:cNvPr id="4" name="ellipse 2" descr="sci-ppt:obj-002"/>
-          <p:cNvSpPr/>
+      </p:cxnSp>
+      <p:cxnSp>
+        <p:nvCxnSpPr>
+          <p:cNvPr id="4" name="A-E05 line 2" descr="sci-ppt:o002"/>
+          <p:cNvCxnSpPr/>
           <p:nvPr/>
-        </p:nvSpPr>
-        <p:spPr>
-          <a:xfrm>
-            <a:off x="1463040" y="1316736"/>
-            <a:ext cx="658368" cy="658368"/>
-          </a:xfrm>
-          <a:prstGeom prst="ellipse">
+        </p:nvCxnSpPr>
+        <p:spPr>
+          <a:xfrm>
+            <a:off x="914400" y="1371600"/>
+            <a:ext cx="0" cy="3657600"/>
+          </a:xfrm>
+          <a:prstGeom prst="line">
             <a:avLst/>
           </a:prstGeom>
-          <a:solidFill>
-            <a:srgbClr val="213E4B"/>
-          </a:solidFill>
-          <a:ln w="17780">
+          <a:ln w="19050">
             <a:solidFill>
               <a:srgbClr val="B4C7D2"/>
             </a:solidFill>
           </a:ln>
           <a:effectLst/>
         </p:spPr>
-        <p:txBody>
-          <a:bodyPr rtlCol="0" anchor="ctr"/>
-          <a:lstStyle/>
-          <a:p>
-            <a:pPr algn="ctr"/>
-          </a:p>
-        </p:txBody>
-      </p:sp>
+      </p:cxnSp>
       <p:cxnSp>
         <p:nvCxnSpPr>
-          <p:cNvPr id="5" name="arrow 3" descr="sci-ppt:obj-003"/>
+          <p:cNvPr id="5" name="A-E05 line 3" descr="sci-ppt:o003"/>
           <p:cNvCxnSpPr/>
           <p:nvPr/>
         </p:nvCxnSpPr>
         <p:spPr>
           <a:xfrm>
-            <a:off x="1792224" y="1645920"/>
-            <a:ext cx="329184" cy="0"/>
+            <a:off x="914400" y="5029200"/>
+            <a:ext cx="0" cy="64008"/>
           </a:xfrm>
           <a:prstGeom prst="line">
             <a:avLst/>
           </a:prstGeom>
-          <a:ln w="21590">
+          <a:ln w="12700">
             <a:solidFill>
-              <a:srgbClr val="8EDBD4"/>
+              <a:srgbClr val="B4C7D2"/>
             </a:solidFill>
-            <a:headEnd type="none" w="med" len="med"/>
-            <a:tailEnd type="triangle" w="med" len="med"/>
           </a:ln>
           <a:effectLst/>
         </p:spPr>
       </p:cxnSp>
-      <p:sp>
-        <p:nvSpPr>
-          <p:cNvPr id="6" name="text 4" descr="sci-ppt:obj-004"/>
+      <p:cxnSp>
+        <p:nvCxnSpPr>
+          <p:cNvPr id="6" name="A-E05 line 4" descr="sci-ppt:o004"/>
+          <p:cNvCxnSpPr/>
+          <p:nvPr/>
+        </p:nvCxnSpPr>
+        <p:spPr>
+          <a:xfrm>
+            <a:off x="914400" y="1371600"/>
+            <a:ext cx="0" cy="3657600"/>
+          </a:xfrm>
+          <a:prstGeom prst="line">
+            <a:avLst/>
+          </a:prstGeom>
+          <a:ln w="7620">
+            <a:solidFill>
+              <a:srgbClr val="2E4756"/>
+            </a:solidFill>
+          </a:ln>
+          <a:effectLst/>
+        </p:spPr>
+      </p:cxnSp>
+      <p:sp>
+        <p:nvSpPr>
+          <p:cNvPr id="7" name="A-E05 text 5" descr="sci-ppt:o005"/>
           <p:cNvSpPr txBox="1"/>
           <p:nvPr/>
         </p:nvSpPr>
         <p:spPr>
           <a:xfrm>
-            <a:off x="1755648" y="1271016"/>
-            <a:ext cx="1097280" cy="310896"/>
+            <a:off x="457200" y="5111496"/>
+            <a:ext cx="914400" cy="208407"/>
           </a:xfrm>
           <a:prstGeom prst="rect">
             <a:avLst/>
@@ -3240,7 +3242,949 @@
           <a:effectLst/>
         </p:spPr>
         <p:txBody>
-          <a:bodyPr wrap="none" lIns="0" rIns="0" tIns="0" bIns="0" anchor="ctr">
+          <a:bodyPr wrap="none" lIns="18288" rIns="18288" tIns="18288" bIns="18288" anchor="t">
+            <a:spAutoFit/>
+          </a:bodyPr>
+          <a:lstStyle/>
+          <a:p>
+            <a:pPr algn="ctr">
+              <a:spcAft>
+                <a:spcPts val="0"/>
+              </a:spcAft>
+            </a:pPr>
+            <a:r>
+              <a:rPr sz="1050" b="0" i="0">
+                <a:solidFill>
+                  <a:srgbClr val="B4C7D2"/>
+                </a:solidFill>
+                <a:latin typeface="Arial"/>
+              </a:rPr>
+              <a:t>1</a:t>
+            </a:r>
+          </a:p>
+        </p:txBody>
+      </p:sp>
+      <p:cxnSp>
+        <p:nvCxnSpPr>
+          <p:cNvPr id="8" name="A-E05 line 6" descr="sci-ppt:o006"/>
+          <p:cNvCxnSpPr/>
+          <p:nvPr/>
+        </p:nvCxnSpPr>
+        <p:spPr>
+          <a:xfrm>
+            <a:off x="1564640" y="5029200"/>
+            <a:ext cx="0" cy="64008"/>
+          </a:xfrm>
+          <a:prstGeom prst="line">
+            <a:avLst/>
+          </a:prstGeom>
+          <a:ln w="12700">
+            <a:solidFill>
+              <a:srgbClr val="B4C7D2"/>
+            </a:solidFill>
+          </a:ln>
+          <a:effectLst/>
+        </p:spPr>
+      </p:cxnSp>
+      <p:cxnSp>
+        <p:nvCxnSpPr>
+          <p:cNvPr id="9" name="A-E05 line 7" descr="sci-ppt:o007"/>
+          <p:cNvCxnSpPr/>
+          <p:nvPr/>
+        </p:nvCxnSpPr>
+        <p:spPr>
+          <a:xfrm>
+            <a:off x="1564640" y="1371600"/>
+            <a:ext cx="0" cy="3657600"/>
+          </a:xfrm>
+          <a:prstGeom prst="line">
+            <a:avLst/>
+          </a:prstGeom>
+          <a:ln w="7620">
+            <a:solidFill>
+              <a:srgbClr val="2E4756"/>
+            </a:solidFill>
+          </a:ln>
+          <a:effectLst/>
+        </p:spPr>
+      </p:cxnSp>
+      <p:sp>
+        <p:nvSpPr>
+          <p:cNvPr id="10" name="A-E05 text 8" descr="sci-ppt:o008"/>
+          <p:cNvSpPr txBox="1"/>
+          <p:nvPr/>
+        </p:nvSpPr>
+        <p:spPr>
+          <a:xfrm>
+            <a:off x="1107440" y="5111496"/>
+            <a:ext cx="914400" cy="208407"/>
+          </a:xfrm>
+          <a:prstGeom prst="rect">
+            <a:avLst/>
+          </a:prstGeom>
+          <a:noFill/>
+          <a:effectLst/>
+        </p:spPr>
+        <p:txBody>
+          <a:bodyPr wrap="none" lIns="18288" rIns="18288" tIns="18288" bIns="18288" anchor="t">
+            <a:spAutoFit/>
+          </a:bodyPr>
+          <a:lstStyle/>
+          <a:p>
+            <a:pPr algn="ctr">
+              <a:spcAft>
+                <a:spcPts val="0"/>
+              </a:spcAft>
+            </a:pPr>
+            <a:r>
+              <a:rPr sz="1050" b="0" i="0">
+                <a:solidFill>
+                  <a:srgbClr val="B4C7D2"/>
+                </a:solidFill>
+                <a:latin typeface="Arial"/>
+              </a:rPr>
+              <a:t>2</a:t>
+            </a:r>
+          </a:p>
+        </p:txBody>
+      </p:sp>
+      <p:cxnSp>
+        <p:nvCxnSpPr>
+          <p:cNvPr id="11" name="A-E05 line 9" descr="sci-ppt:o009"/>
+          <p:cNvCxnSpPr/>
+          <p:nvPr/>
+        </p:nvCxnSpPr>
+        <p:spPr>
+          <a:xfrm>
+            <a:off x="2865120" y="5029200"/>
+            <a:ext cx="0" cy="64008"/>
+          </a:xfrm>
+          <a:prstGeom prst="line">
+            <a:avLst/>
+          </a:prstGeom>
+          <a:ln w="12700">
+            <a:solidFill>
+              <a:srgbClr val="B4C7D2"/>
+            </a:solidFill>
+          </a:ln>
+          <a:effectLst/>
+        </p:spPr>
+      </p:cxnSp>
+      <p:cxnSp>
+        <p:nvCxnSpPr>
+          <p:cNvPr id="12" name="A-E05 line 10" descr="sci-ppt:o010"/>
+          <p:cNvCxnSpPr/>
+          <p:nvPr/>
+        </p:nvCxnSpPr>
+        <p:spPr>
+          <a:xfrm>
+            <a:off x="2865120" y="1371600"/>
+            <a:ext cx="0" cy="3657600"/>
+          </a:xfrm>
+          <a:prstGeom prst="line">
+            <a:avLst/>
+          </a:prstGeom>
+          <a:ln w="7620">
+            <a:solidFill>
+              <a:srgbClr val="2E4756"/>
+            </a:solidFill>
+          </a:ln>
+          <a:effectLst/>
+        </p:spPr>
+      </p:cxnSp>
+      <p:sp>
+        <p:nvSpPr>
+          <p:cNvPr id="13" name="A-E05 text 11" descr="sci-ppt:o011"/>
+          <p:cNvSpPr txBox="1"/>
+          <p:nvPr/>
+        </p:nvSpPr>
+        <p:spPr>
+          <a:xfrm>
+            <a:off x="2407920" y="5111496"/>
+            <a:ext cx="914400" cy="208407"/>
+          </a:xfrm>
+          <a:prstGeom prst="rect">
+            <a:avLst/>
+          </a:prstGeom>
+          <a:noFill/>
+          <a:effectLst/>
+        </p:spPr>
+        <p:txBody>
+          <a:bodyPr wrap="none" lIns="18288" rIns="18288" tIns="18288" bIns="18288" anchor="t">
+            <a:spAutoFit/>
+          </a:bodyPr>
+          <a:lstStyle/>
+          <a:p>
+            <a:pPr algn="ctr">
+              <a:spcAft>
+                <a:spcPts val="0"/>
+              </a:spcAft>
+            </a:pPr>
+            <a:r>
+              <a:rPr sz="1050" b="0" i="0">
+                <a:solidFill>
+                  <a:srgbClr val="B4C7D2"/>
+                </a:solidFill>
+                <a:latin typeface="Arial"/>
+              </a:rPr>
+              <a:t>4</a:t>
+            </a:r>
+          </a:p>
+        </p:txBody>
+      </p:sp>
+      <p:cxnSp>
+        <p:nvCxnSpPr>
+          <p:cNvPr id="14" name="A-E05 line 12" descr="sci-ppt:o012"/>
+          <p:cNvCxnSpPr/>
+          <p:nvPr/>
+        </p:nvCxnSpPr>
+        <p:spPr>
+          <a:xfrm>
+            <a:off x="4165600" y="5029200"/>
+            <a:ext cx="0" cy="64008"/>
+          </a:xfrm>
+          <a:prstGeom prst="line">
+            <a:avLst/>
+          </a:prstGeom>
+          <a:ln w="12700">
+            <a:solidFill>
+              <a:srgbClr val="B4C7D2"/>
+            </a:solidFill>
+          </a:ln>
+          <a:effectLst/>
+        </p:spPr>
+      </p:cxnSp>
+      <p:cxnSp>
+        <p:nvCxnSpPr>
+          <p:cNvPr id="15" name="A-E05 line 13" descr="sci-ppt:o013"/>
+          <p:cNvCxnSpPr/>
+          <p:nvPr/>
+        </p:nvCxnSpPr>
+        <p:spPr>
+          <a:xfrm>
+            <a:off x="4165600" y="1371600"/>
+            <a:ext cx="0" cy="3657600"/>
+          </a:xfrm>
+          <a:prstGeom prst="line">
+            <a:avLst/>
+          </a:prstGeom>
+          <a:ln w="7620">
+            <a:solidFill>
+              <a:srgbClr val="2E4756"/>
+            </a:solidFill>
+          </a:ln>
+          <a:effectLst/>
+        </p:spPr>
+      </p:cxnSp>
+      <p:sp>
+        <p:nvSpPr>
+          <p:cNvPr id="16" name="A-E05 text 14" descr="sci-ppt:o014"/>
+          <p:cNvSpPr txBox="1"/>
+          <p:nvPr/>
+        </p:nvSpPr>
+        <p:spPr>
+          <a:xfrm>
+            <a:off x="3708400" y="5111496"/>
+            <a:ext cx="914400" cy="208407"/>
+          </a:xfrm>
+          <a:prstGeom prst="rect">
+            <a:avLst/>
+          </a:prstGeom>
+          <a:noFill/>
+          <a:effectLst/>
+        </p:spPr>
+        <p:txBody>
+          <a:bodyPr wrap="none" lIns="18288" rIns="18288" tIns="18288" bIns="18288" anchor="t">
+            <a:spAutoFit/>
+          </a:bodyPr>
+          <a:lstStyle/>
+          <a:p>
+            <a:pPr algn="ctr">
+              <a:spcAft>
+                <a:spcPts val="0"/>
+              </a:spcAft>
+            </a:pPr>
+            <a:r>
+              <a:rPr sz="1050" b="0" i="0">
+                <a:solidFill>
+                  <a:srgbClr val="B4C7D2"/>
+                </a:solidFill>
+                <a:latin typeface="Arial"/>
+              </a:rPr>
+              <a:t>6</a:t>
+            </a:r>
+          </a:p>
+        </p:txBody>
+      </p:sp>
+      <p:cxnSp>
+        <p:nvCxnSpPr>
+          <p:cNvPr id="17" name="A-E05 line 15" descr="sci-ppt:o015"/>
+          <p:cNvCxnSpPr/>
+          <p:nvPr/>
+        </p:nvCxnSpPr>
+        <p:spPr>
+          <a:xfrm>
+            <a:off x="5466080" y="5029200"/>
+            <a:ext cx="0" cy="64008"/>
+          </a:xfrm>
+          <a:prstGeom prst="line">
+            <a:avLst/>
+          </a:prstGeom>
+          <a:ln w="12700">
+            <a:solidFill>
+              <a:srgbClr val="B4C7D2"/>
+            </a:solidFill>
+          </a:ln>
+          <a:effectLst/>
+        </p:spPr>
+      </p:cxnSp>
+      <p:cxnSp>
+        <p:nvCxnSpPr>
+          <p:cNvPr id="18" name="A-E05 line 16" descr="sci-ppt:o016"/>
+          <p:cNvCxnSpPr/>
+          <p:nvPr/>
+        </p:nvCxnSpPr>
+        <p:spPr>
+          <a:xfrm>
+            <a:off x="5466080" y="1371600"/>
+            <a:ext cx="0" cy="3657600"/>
+          </a:xfrm>
+          <a:prstGeom prst="line">
+            <a:avLst/>
+          </a:prstGeom>
+          <a:ln w="7620">
+            <a:solidFill>
+              <a:srgbClr val="2E4756"/>
+            </a:solidFill>
+          </a:ln>
+          <a:effectLst/>
+        </p:spPr>
+      </p:cxnSp>
+      <p:sp>
+        <p:nvSpPr>
+          <p:cNvPr id="19" name="A-E05 text 17" descr="sci-ppt:o017"/>
+          <p:cNvSpPr txBox="1"/>
+          <p:nvPr/>
+        </p:nvSpPr>
+        <p:spPr>
+          <a:xfrm>
+            <a:off x="5008880" y="5111496"/>
+            <a:ext cx="914400" cy="208407"/>
+          </a:xfrm>
+          <a:prstGeom prst="rect">
+            <a:avLst/>
+          </a:prstGeom>
+          <a:noFill/>
+          <a:effectLst/>
+        </p:spPr>
+        <p:txBody>
+          <a:bodyPr wrap="none" lIns="18288" rIns="18288" tIns="18288" bIns="18288" anchor="t">
+            <a:spAutoFit/>
+          </a:bodyPr>
+          <a:lstStyle/>
+          <a:p>
+            <a:pPr algn="ctr">
+              <a:spcAft>
+                <a:spcPts val="0"/>
+              </a:spcAft>
+            </a:pPr>
+            <a:r>
+              <a:rPr sz="1050" b="0" i="0">
+                <a:solidFill>
+                  <a:srgbClr val="B4C7D2"/>
+                </a:solidFill>
+                <a:latin typeface="Arial"/>
+              </a:rPr>
+              <a:t>8</a:t>
+            </a:r>
+          </a:p>
+        </p:txBody>
+      </p:sp>
+      <p:cxnSp>
+        <p:nvCxnSpPr>
+          <p:cNvPr id="20" name="A-E05 line 18" descr="sci-ppt:o018"/>
+          <p:cNvCxnSpPr/>
+          <p:nvPr/>
+        </p:nvCxnSpPr>
+        <p:spPr>
+          <a:xfrm>
+            <a:off x="6766560" y="5029200"/>
+            <a:ext cx="0" cy="64008"/>
+          </a:xfrm>
+          <a:prstGeom prst="line">
+            <a:avLst/>
+          </a:prstGeom>
+          <a:ln w="12700">
+            <a:solidFill>
+              <a:srgbClr val="B4C7D2"/>
+            </a:solidFill>
+          </a:ln>
+          <a:effectLst/>
+        </p:spPr>
+      </p:cxnSp>
+      <p:cxnSp>
+        <p:nvCxnSpPr>
+          <p:cNvPr id="21" name="A-E05 line 19" descr="sci-ppt:o019"/>
+          <p:cNvCxnSpPr/>
+          <p:nvPr/>
+        </p:nvCxnSpPr>
+        <p:spPr>
+          <a:xfrm>
+            <a:off x="6766560" y="1371600"/>
+            <a:ext cx="0" cy="3657600"/>
+          </a:xfrm>
+          <a:prstGeom prst="line">
+            <a:avLst/>
+          </a:prstGeom>
+          <a:ln w="7620">
+            <a:solidFill>
+              <a:srgbClr val="2E4756"/>
+            </a:solidFill>
+          </a:ln>
+          <a:effectLst/>
+        </p:spPr>
+      </p:cxnSp>
+      <p:sp>
+        <p:nvSpPr>
+          <p:cNvPr id="22" name="A-E05 text 20" descr="sci-ppt:o020"/>
+          <p:cNvSpPr txBox="1"/>
+          <p:nvPr/>
+        </p:nvSpPr>
+        <p:spPr>
+          <a:xfrm>
+            <a:off x="6309360" y="5111496"/>
+            <a:ext cx="914400" cy="208407"/>
+          </a:xfrm>
+          <a:prstGeom prst="rect">
+            <a:avLst/>
+          </a:prstGeom>
+          <a:noFill/>
+          <a:effectLst/>
+        </p:spPr>
+        <p:txBody>
+          <a:bodyPr wrap="none" lIns="18288" rIns="18288" tIns="18288" bIns="18288" anchor="t">
+            <a:spAutoFit/>
+          </a:bodyPr>
+          <a:lstStyle/>
+          <a:p>
+            <a:pPr algn="ctr">
+              <a:spcAft>
+                <a:spcPts val="0"/>
+              </a:spcAft>
+            </a:pPr>
+            <a:r>
+              <a:rPr sz="1050" b="0" i="0">
+                <a:solidFill>
+                  <a:srgbClr val="B4C7D2"/>
+                </a:solidFill>
+                <a:latin typeface="Arial"/>
+              </a:rPr>
+              <a:t>10</a:t>
+            </a:r>
+          </a:p>
+        </p:txBody>
+      </p:sp>
+      <p:cxnSp>
+        <p:nvCxnSpPr>
+          <p:cNvPr id="23" name="A-E05 line 21" descr="sci-ppt:o021"/>
+          <p:cNvCxnSpPr/>
+          <p:nvPr/>
+        </p:nvCxnSpPr>
+        <p:spPr>
+          <a:xfrm>
+            <a:off x="850392" y="5029200"/>
+            <a:ext cx="64008" cy="0"/>
+          </a:xfrm>
+          <a:prstGeom prst="line">
+            <a:avLst/>
+          </a:prstGeom>
+          <a:ln w="12700">
+            <a:solidFill>
+              <a:srgbClr val="B4C7D2"/>
+            </a:solidFill>
+          </a:ln>
+          <a:effectLst/>
+        </p:spPr>
+      </p:cxnSp>
+      <p:cxnSp>
+        <p:nvCxnSpPr>
+          <p:cNvPr id="24" name="A-E05 line 22" descr="sci-ppt:o022"/>
+          <p:cNvCxnSpPr/>
+          <p:nvPr/>
+        </p:nvCxnSpPr>
+        <p:spPr>
+          <a:xfrm>
+            <a:off x="850392" y="4376057"/>
+            <a:ext cx="64008" cy="0"/>
+          </a:xfrm>
+          <a:prstGeom prst="line">
+            <a:avLst/>
+          </a:prstGeom>
+          <a:ln w="12700">
+            <a:solidFill>
+              <a:srgbClr val="B4C7D2"/>
+            </a:solidFill>
+          </a:ln>
+          <a:effectLst/>
+        </p:spPr>
+      </p:cxnSp>
+      <p:cxnSp>
+        <p:nvCxnSpPr>
+          <p:cNvPr id="25" name="A-E05 line 23" descr="sci-ppt:o023"/>
+          <p:cNvCxnSpPr/>
+          <p:nvPr/>
+        </p:nvCxnSpPr>
+        <p:spPr>
+          <a:xfrm>
+            <a:off x="914400" y="4376057"/>
+            <a:ext cx="5852160" cy="0"/>
+          </a:xfrm>
+          <a:prstGeom prst="line">
+            <a:avLst/>
+          </a:prstGeom>
+          <a:ln w="7620">
+            <a:solidFill>
+              <a:srgbClr val="2E4756"/>
+            </a:solidFill>
+          </a:ln>
+          <a:effectLst/>
+        </p:spPr>
+      </p:cxnSp>
+      <p:sp>
+        <p:nvSpPr>
+          <p:cNvPr id="26" name="A-E05 text 24" descr="sci-ppt:o024"/>
+          <p:cNvSpPr txBox="1"/>
+          <p:nvPr/>
+        </p:nvSpPr>
+        <p:spPr>
+          <a:xfrm>
+            <a:off x="45720" y="4293761"/>
+            <a:ext cx="777240" cy="208407"/>
+          </a:xfrm>
+          <a:prstGeom prst="rect">
+            <a:avLst/>
+          </a:prstGeom>
+          <a:noFill/>
+          <a:effectLst/>
+        </p:spPr>
+        <p:txBody>
+          <a:bodyPr wrap="none" lIns="18288" rIns="18288" tIns="18288" bIns="18288" anchor="t">
+            <a:spAutoFit/>
+          </a:bodyPr>
+          <a:lstStyle/>
+          <a:p>
+            <a:pPr algn="r">
+              <a:spcAft>
+                <a:spcPts val="0"/>
+              </a:spcAft>
+            </a:pPr>
+            <a:r>
+              <a:rPr sz="1050" b="0" i="0">
+                <a:solidFill>
+                  <a:srgbClr val="B4C7D2"/>
+                </a:solidFill>
+                <a:latin typeface="Arial"/>
+              </a:rPr>
+              <a:t>0.5</a:t>
+            </a:r>
+          </a:p>
+        </p:txBody>
+      </p:sp>
+      <p:cxnSp>
+        <p:nvCxnSpPr>
+          <p:cNvPr id="27" name="A-E05 line 25" descr="sci-ppt:o025"/>
+          <p:cNvCxnSpPr/>
+          <p:nvPr/>
+        </p:nvCxnSpPr>
+        <p:spPr>
+          <a:xfrm>
+            <a:off x="850392" y="3722914"/>
+            <a:ext cx="64008" cy="0"/>
+          </a:xfrm>
+          <a:prstGeom prst="line">
+            <a:avLst/>
+          </a:prstGeom>
+          <a:ln w="12700">
+            <a:solidFill>
+              <a:srgbClr val="B4C7D2"/>
+            </a:solidFill>
+          </a:ln>
+          <a:effectLst/>
+        </p:spPr>
+      </p:cxnSp>
+      <p:cxnSp>
+        <p:nvCxnSpPr>
+          <p:cNvPr id="28" name="A-E05 line 26" descr="sci-ppt:o026"/>
+          <p:cNvCxnSpPr/>
+          <p:nvPr/>
+        </p:nvCxnSpPr>
+        <p:spPr>
+          <a:xfrm>
+            <a:off x="914400" y="3722914"/>
+            <a:ext cx="5852160" cy="0"/>
+          </a:xfrm>
+          <a:prstGeom prst="line">
+            <a:avLst/>
+          </a:prstGeom>
+          <a:ln w="7620">
+            <a:solidFill>
+              <a:srgbClr val="2E4756"/>
+            </a:solidFill>
+          </a:ln>
+          <a:effectLst/>
+        </p:spPr>
+      </p:cxnSp>
+      <p:sp>
+        <p:nvSpPr>
+          <p:cNvPr id="29" name="A-E05 text 27" descr="sci-ppt:o027"/>
+          <p:cNvSpPr txBox="1"/>
+          <p:nvPr/>
+        </p:nvSpPr>
+        <p:spPr>
+          <a:xfrm>
+            <a:off x="45720" y="3640618"/>
+            <a:ext cx="777240" cy="208407"/>
+          </a:xfrm>
+          <a:prstGeom prst="rect">
+            <a:avLst/>
+          </a:prstGeom>
+          <a:noFill/>
+          <a:effectLst/>
+        </p:spPr>
+        <p:txBody>
+          <a:bodyPr wrap="none" lIns="18288" rIns="18288" tIns="18288" bIns="18288" anchor="t">
+            <a:spAutoFit/>
+          </a:bodyPr>
+          <a:lstStyle/>
+          <a:p>
+            <a:pPr algn="r">
+              <a:spcAft>
+                <a:spcPts val="0"/>
+              </a:spcAft>
+            </a:pPr>
+            <a:r>
+              <a:rPr sz="1050" b="0" i="0">
+                <a:solidFill>
+                  <a:srgbClr val="B4C7D2"/>
+                </a:solidFill>
+                <a:latin typeface="Arial"/>
+              </a:rPr>
+              <a:t>1.0</a:t>
+            </a:r>
+          </a:p>
+        </p:txBody>
+      </p:sp>
+      <p:cxnSp>
+        <p:nvCxnSpPr>
+          <p:cNvPr id="30" name="A-E05 line 28" descr="sci-ppt:o028"/>
+          <p:cNvCxnSpPr/>
+          <p:nvPr/>
+        </p:nvCxnSpPr>
+        <p:spPr>
+          <a:xfrm>
+            <a:off x="850392" y="3069771"/>
+            <a:ext cx="64008" cy="0"/>
+          </a:xfrm>
+          <a:prstGeom prst="line">
+            <a:avLst/>
+          </a:prstGeom>
+          <a:ln w="12700">
+            <a:solidFill>
+              <a:srgbClr val="B4C7D2"/>
+            </a:solidFill>
+          </a:ln>
+          <a:effectLst/>
+        </p:spPr>
+      </p:cxnSp>
+      <p:cxnSp>
+        <p:nvCxnSpPr>
+          <p:cNvPr id="31" name="A-E05 line 29" descr="sci-ppt:o029"/>
+          <p:cNvCxnSpPr/>
+          <p:nvPr/>
+        </p:nvCxnSpPr>
+        <p:spPr>
+          <a:xfrm>
+            <a:off x="914400" y="3069771"/>
+            <a:ext cx="5852160" cy="0"/>
+          </a:xfrm>
+          <a:prstGeom prst="line">
+            <a:avLst/>
+          </a:prstGeom>
+          <a:ln w="7620">
+            <a:solidFill>
+              <a:srgbClr val="2E4756"/>
+            </a:solidFill>
+          </a:ln>
+          <a:effectLst/>
+        </p:spPr>
+      </p:cxnSp>
+      <p:sp>
+        <p:nvSpPr>
+          <p:cNvPr id="32" name="A-E05 text 30" descr="sci-ppt:o030"/>
+          <p:cNvSpPr txBox="1"/>
+          <p:nvPr/>
+        </p:nvSpPr>
+        <p:spPr>
+          <a:xfrm>
+            <a:off x="45720" y="2987475"/>
+            <a:ext cx="777240" cy="208407"/>
+          </a:xfrm>
+          <a:prstGeom prst="rect">
+            <a:avLst/>
+          </a:prstGeom>
+          <a:noFill/>
+          <a:effectLst/>
+        </p:spPr>
+        <p:txBody>
+          <a:bodyPr wrap="none" lIns="18288" rIns="18288" tIns="18288" bIns="18288" anchor="t">
+            <a:spAutoFit/>
+          </a:bodyPr>
+          <a:lstStyle/>
+          <a:p>
+            <a:pPr algn="r">
+              <a:spcAft>
+                <a:spcPts val="0"/>
+              </a:spcAft>
+            </a:pPr>
+            <a:r>
+              <a:rPr sz="1050" b="0" i="0">
+                <a:solidFill>
+                  <a:srgbClr val="B4C7D2"/>
+                </a:solidFill>
+                <a:latin typeface="Arial"/>
+              </a:rPr>
+              <a:t>1.5</a:t>
+            </a:r>
+          </a:p>
+        </p:txBody>
+      </p:sp>
+      <p:cxnSp>
+        <p:nvCxnSpPr>
+          <p:cNvPr id="33" name="A-E05 line 31" descr="sci-ppt:o031"/>
+          <p:cNvCxnSpPr/>
+          <p:nvPr/>
+        </p:nvCxnSpPr>
+        <p:spPr>
+          <a:xfrm>
+            <a:off x="850392" y="2416628"/>
+            <a:ext cx="64008" cy="0"/>
+          </a:xfrm>
+          <a:prstGeom prst="line">
+            <a:avLst/>
+          </a:prstGeom>
+          <a:ln w="12700">
+            <a:solidFill>
+              <a:srgbClr val="B4C7D2"/>
+            </a:solidFill>
+          </a:ln>
+          <a:effectLst/>
+        </p:spPr>
+      </p:cxnSp>
+      <p:cxnSp>
+        <p:nvCxnSpPr>
+          <p:cNvPr id="34" name="A-E05 line 32" descr="sci-ppt:o032"/>
+          <p:cNvCxnSpPr/>
+          <p:nvPr/>
+        </p:nvCxnSpPr>
+        <p:spPr>
+          <a:xfrm>
+            <a:off x="914400" y="2416628"/>
+            <a:ext cx="5852160" cy="0"/>
+          </a:xfrm>
+          <a:prstGeom prst="line">
+            <a:avLst/>
+          </a:prstGeom>
+          <a:ln w="7620">
+            <a:solidFill>
+              <a:srgbClr val="2E4756"/>
+            </a:solidFill>
+          </a:ln>
+          <a:effectLst/>
+        </p:spPr>
+      </p:cxnSp>
+      <p:sp>
+        <p:nvSpPr>
+          <p:cNvPr id="35" name="A-E05 text 33" descr="sci-ppt:o033"/>
+          <p:cNvSpPr txBox="1"/>
+          <p:nvPr/>
+        </p:nvSpPr>
+        <p:spPr>
+          <a:xfrm>
+            <a:off x="45720" y="2334332"/>
+            <a:ext cx="777240" cy="208407"/>
+          </a:xfrm>
+          <a:prstGeom prst="rect">
+            <a:avLst/>
+          </a:prstGeom>
+          <a:noFill/>
+          <a:effectLst/>
+        </p:spPr>
+        <p:txBody>
+          <a:bodyPr wrap="none" lIns="18288" rIns="18288" tIns="18288" bIns="18288" anchor="t">
+            <a:spAutoFit/>
+          </a:bodyPr>
+          <a:lstStyle/>
+          <a:p>
+            <a:pPr algn="r">
+              <a:spcAft>
+                <a:spcPts val="0"/>
+              </a:spcAft>
+            </a:pPr>
+            <a:r>
+              <a:rPr sz="1050" b="0" i="0">
+                <a:solidFill>
+                  <a:srgbClr val="B4C7D2"/>
+                </a:solidFill>
+                <a:latin typeface="Arial"/>
+              </a:rPr>
+              <a:t>2.0</a:t>
+            </a:r>
+          </a:p>
+        </p:txBody>
+      </p:sp>
+      <p:cxnSp>
+        <p:nvCxnSpPr>
+          <p:cNvPr id="36" name="A-E05 line 34" descr="sci-ppt:o034"/>
+          <p:cNvCxnSpPr/>
+          <p:nvPr/>
+        </p:nvCxnSpPr>
+        <p:spPr>
+          <a:xfrm>
+            <a:off x="850392" y="1763485"/>
+            <a:ext cx="64008" cy="0"/>
+          </a:xfrm>
+          <a:prstGeom prst="line">
+            <a:avLst/>
+          </a:prstGeom>
+          <a:ln w="12700">
+            <a:solidFill>
+              <a:srgbClr val="B4C7D2"/>
+            </a:solidFill>
+          </a:ln>
+          <a:effectLst/>
+        </p:spPr>
+      </p:cxnSp>
+      <p:cxnSp>
+        <p:nvCxnSpPr>
+          <p:cNvPr id="37" name="A-E05 line 35" descr="sci-ppt:o035"/>
+          <p:cNvCxnSpPr/>
+          <p:nvPr/>
+        </p:nvCxnSpPr>
+        <p:spPr>
+          <a:xfrm>
+            <a:off x="914400" y="1763485"/>
+            <a:ext cx="5852160" cy="0"/>
+          </a:xfrm>
+          <a:prstGeom prst="line">
+            <a:avLst/>
+          </a:prstGeom>
+          <a:ln w="7620">
+            <a:solidFill>
+              <a:srgbClr val="2E4756"/>
+            </a:solidFill>
+          </a:ln>
+          <a:effectLst/>
+        </p:spPr>
+      </p:cxnSp>
+      <p:sp>
+        <p:nvSpPr>
+          <p:cNvPr id="38" name="A-E05 text 36" descr="sci-ppt:o036"/>
+          <p:cNvSpPr txBox="1"/>
+          <p:nvPr/>
+        </p:nvSpPr>
+        <p:spPr>
+          <a:xfrm>
+            <a:off x="45720" y="1681189"/>
+            <a:ext cx="777240" cy="208407"/>
+          </a:xfrm>
+          <a:prstGeom prst="rect">
+            <a:avLst/>
+          </a:prstGeom>
+          <a:noFill/>
+          <a:effectLst/>
+        </p:spPr>
+        <p:txBody>
+          <a:bodyPr wrap="none" lIns="18288" rIns="18288" tIns="18288" bIns="18288" anchor="t">
+            <a:spAutoFit/>
+          </a:bodyPr>
+          <a:lstStyle/>
+          <a:p>
+            <a:pPr algn="r">
+              <a:spcAft>
+                <a:spcPts val="0"/>
+              </a:spcAft>
+            </a:pPr>
+            <a:r>
+              <a:rPr sz="1050" b="0" i="0">
+                <a:solidFill>
+                  <a:srgbClr val="B4C7D2"/>
+                </a:solidFill>
+                <a:latin typeface="Arial"/>
+              </a:rPr>
+              <a:t>2.5</a:t>
+            </a:r>
+          </a:p>
+        </p:txBody>
+      </p:sp>
+      <p:sp>
+        <p:nvSpPr>
+          <p:cNvPr id="39" name="A-E05 text 37" descr="sci-ppt:o037"/>
+          <p:cNvSpPr txBox="1"/>
+          <p:nvPr/>
+        </p:nvSpPr>
+        <p:spPr>
+          <a:xfrm>
+            <a:off x="914400" y="5312664"/>
+            <a:ext cx="5852160" cy="231648"/>
+          </a:xfrm>
+          <a:prstGeom prst="rect">
+            <a:avLst/>
+          </a:prstGeom>
+          <a:noFill/>
+          <a:effectLst/>
+        </p:spPr>
+        <p:txBody>
+          <a:bodyPr wrap="none" lIns="18288" rIns="18288" tIns="18288" bIns="18288" anchor="t">
+            <a:spAutoFit/>
+          </a:bodyPr>
+          <a:lstStyle/>
+          <a:p>
+            <a:pPr algn="ctr">
+              <a:spcAft>
+                <a:spcPts val="0"/>
+              </a:spcAft>
+            </a:pPr>
+            <a:r>
+              <a:rPr sz="1200" b="0" i="0">
+                <a:solidFill>
+                  <a:srgbClr val="E7F0F3"/>
+                </a:solidFill>
+                <a:latin typeface="Arial"/>
+              </a:rPr>
+              <a:t>R / R_ref</a:t>
+            </a:r>
+          </a:p>
+        </p:txBody>
+      </p:sp>
+      <p:sp>
+        <p:nvSpPr>
+          <p:cNvPr id="40" name="A-E05 text 38" descr="sci-ppt:o038"/>
+          <p:cNvSpPr txBox="1"/>
+          <p:nvPr/>
+        </p:nvSpPr>
+        <p:spPr>
+          <a:xfrm>
+            <a:off x="365760" y="1024128"/>
+            <a:ext cx="5852160" cy="231648"/>
+          </a:xfrm>
+          <a:prstGeom prst="rect">
+            <a:avLst/>
+          </a:prstGeom>
+          <a:noFill/>
+          <a:effectLst/>
+        </p:spPr>
+        <p:txBody>
+          <a:bodyPr wrap="none" lIns="18288" rIns="18288" tIns="18288" bIns="18288" anchor="t">
             <a:spAutoFit/>
           </a:bodyPr>
           <a:lstStyle/>
@@ -3251,51 +4195,541 @@
               </a:spcAft>
             </a:pPr>
             <a:r>
-              <a:rPr sz="1296" b="0" i="0">
+              <a:rPr sz="1200" b="0" i="0">
                 <a:solidFill>
                   <a:srgbClr val="E7F0F3"/>
                 </a:solidFill>
                 <a:latin typeface="Arial"/>
               </a:rPr>
-              <a:t>Rref</a:t>
-            </a:r>
+              <a:t>pₑₗ / G_g</a:t>
+            </a:r>
+          </a:p>
+        </p:txBody>
+      </p:sp>
+      <p:sp>
+        <p:nvSpPr>
+          <p:cNvPr id="41" name="A-E05 polygon 39" descr="sci-ppt:o039"/>
+          <p:cNvSpPr/>
+          <p:nvPr/>
+        </p:nvSpPr>
+        <p:spPr>
+          <a:xfrm>
+            <a:off x="914400" y="2024808"/>
+            <a:ext cx="5852160" cy="3004392"/>
+          </a:xfrm>
+          <a:custGeom>
+            <a:avLst/>
+            <a:gdLst/>
+            <a:ahLst/>
+            <a:cxnLst/>
+            <a:rect l="l" t="t" r="r" b="b"/>
+            <a:pathLst>
+              <a:path w="5852160" h="3004392">
+                <a:moveTo>
+                  <a:pt x="0" y="3004392"/>
+                </a:moveTo>
+                <a:lnTo>
+                  <a:pt x="39144" y="2719859"/>
+                </a:lnTo>
+                <a:lnTo>
+                  <a:pt x="78289" y="2484984"/>
+                </a:lnTo>
+                <a:lnTo>
+                  <a:pt x="117434" y="2287789"/>
+                </a:lnTo>
+                <a:lnTo>
+                  <a:pt x="156579" y="2119775"/>
+                </a:lnTo>
+                <a:lnTo>
+                  <a:pt x="195724" y="1974777"/>
+                </a:lnTo>
+                <a:lnTo>
+                  <a:pt x="234869" y="1848232"/>
+                </a:lnTo>
+                <a:lnTo>
+                  <a:pt x="274014" y="1736704"/>
+                </a:lnTo>
+                <a:lnTo>
+                  <a:pt x="313159" y="1637559"/>
+                </a:lnTo>
+                <a:lnTo>
+                  <a:pt x="352303" y="1548747"/>
+                </a:lnTo>
+                <a:lnTo>
+                  <a:pt x="391448" y="1468652"/>
+                </a:lnTo>
+                <a:lnTo>
+                  <a:pt x="430593" y="1395985"/>
+                </a:lnTo>
+                <a:lnTo>
+                  <a:pt x="469738" y="1329701"/>
+                </a:lnTo>
+                <a:lnTo>
+                  <a:pt x="508883" y="1268948"/>
+                </a:lnTo>
+                <a:lnTo>
+                  <a:pt x="548028" y="1213024"/>
+                </a:lnTo>
+                <a:lnTo>
+                  <a:pt x="587173" y="1161342"/>
+                </a:lnTo>
+                <a:lnTo>
+                  <a:pt x="626318" y="1113410"/>
+                </a:lnTo>
+                <a:lnTo>
+                  <a:pt x="665463" y="1068814"/>
+                </a:lnTo>
+                <a:lnTo>
+                  <a:pt x="704607" y="1027197"/>
+                </a:lnTo>
+                <a:lnTo>
+                  <a:pt x="743752" y="988255"/>
+                </a:lnTo>
+                <a:lnTo>
+                  <a:pt x="782897" y="951726"/>
+                </a:lnTo>
+                <a:lnTo>
+                  <a:pt x="822042" y="917381"/>
+                </a:lnTo>
+                <a:lnTo>
+                  <a:pt x="861187" y="885021"/>
+                </a:lnTo>
+                <a:lnTo>
+                  <a:pt x="900332" y="854471"/>
+                </a:lnTo>
+                <a:lnTo>
+                  <a:pt x="939477" y="825576"/>
+                </a:lnTo>
+                <a:lnTo>
+                  <a:pt x="978622" y="798200"/>
+                </a:lnTo>
+                <a:lnTo>
+                  <a:pt x="1017766" y="772221"/>
+                </a:lnTo>
+                <a:lnTo>
+                  <a:pt x="1056911" y="747531"/>
+                </a:lnTo>
+                <a:lnTo>
+                  <a:pt x="1096056" y="724033"/>
+                </a:lnTo>
+                <a:lnTo>
+                  <a:pt x="1135201" y="701640"/>
+                </a:lnTo>
+                <a:lnTo>
+                  <a:pt x="1174346" y="680272"/>
+                </a:lnTo>
+                <a:lnTo>
+                  <a:pt x="1213491" y="659859"/>
+                </a:lnTo>
+                <a:lnTo>
+                  <a:pt x="1252636" y="640336"/>
+                </a:lnTo>
+                <a:lnTo>
+                  <a:pt x="1291781" y="621644"/>
+                </a:lnTo>
+                <a:lnTo>
+                  <a:pt x="1330926" y="603730"/>
+                </a:lnTo>
+                <a:lnTo>
+                  <a:pt x="1370070" y="586546"/>
+                </a:lnTo>
+                <a:lnTo>
+                  <a:pt x="1409215" y="570045"/>
+                </a:lnTo>
+                <a:lnTo>
+                  <a:pt x="1448360" y="554188"/>
+                </a:lnTo>
+                <a:lnTo>
+                  <a:pt x="1487505" y="538936"/>
+                </a:lnTo>
+                <a:lnTo>
+                  <a:pt x="1526650" y="524255"/>
+                </a:lnTo>
+                <a:lnTo>
+                  <a:pt x="1565795" y="510112"/>
+                </a:lnTo>
+                <a:lnTo>
+                  <a:pt x="1604940" y="496479"/>
+                </a:lnTo>
+                <a:lnTo>
+                  <a:pt x="1644085" y="483326"/>
+                </a:lnTo>
+                <a:lnTo>
+                  <a:pt x="1683229" y="470629"/>
+                </a:lnTo>
+                <a:lnTo>
+                  <a:pt x="1722374" y="458364"/>
+                </a:lnTo>
+                <a:lnTo>
+                  <a:pt x="1761519" y="446510"/>
+                </a:lnTo>
+                <a:lnTo>
+                  <a:pt x="1800664" y="435044"/>
+                </a:lnTo>
+                <a:lnTo>
+                  <a:pt x="1839809" y="423949"/>
+                </a:lnTo>
+                <a:lnTo>
+                  <a:pt x="1878954" y="413206"/>
+                </a:lnTo>
+                <a:lnTo>
+                  <a:pt x="1918099" y="402799"/>
+                </a:lnTo>
+                <a:lnTo>
+                  <a:pt x="1957244" y="392712"/>
+                </a:lnTo>
+                <a:lnTo>
+                  <a:pt x="1996389" y="382929"/>
+                </a:lnTo>
+                <a:lnTo>
+                  <a:pt x="2035533" y="373439"/>
+                </a:lnTo>
+                <a:lnTo>
+                  <a:pt x="2074678" y="364226"/>
+                </a:lnTo>
+                <a:lnTo>
+                  <a:pt x="2113823" y="355279"/>
+                </a:lnTo>
+                <a:lnTo>
+                  <a:pt x="2152968" y="346587"/>
+                </a:lnTo>
+                <a:lnTo>
+                  <a:pt x="2192113" y="338139"/>
+                </a:lnTo>
+                <a:lnTo>
+                  <a:pt x="2231258" y="329925"/>
+                </a:lnTo>
+                <a:lnTo>
+                  <a:pt x="2270403" y="321934"/>
+                </a:lnTo>
+                <a:lnTo>
+                  <a:pt x="2309548" y="314158"/>
+                </a:lnTo>
+                <a:lnTo>
+                  <a:pt x="2348692" y="306588"/>
+                </a:lnTo>
+                <a:lnTo>
+                  <a:pt x="2387837" y="299217"/>
+                </a:lnTo>
+                <a:lnTo>
+                  <a:pt x="2426982" y="292035"/>
+                </a:lnTo>
+                <a:lnTo>
+                  <a:pt x="2466127" y="285037"/>
+                </a:lnTo>
+                <a:lnTo>
+                  <a:pt x="2505272" y="278214"/>
+                </a:lnTo>
+                <a:lnTo>
+                  <a:pt x="2544417" y="271561"/>
+                </a:lnTo>
+                <a:lnTo>
+                  <a:pt x="2583562" y="265070"/>
+                </a:lnTo>
+                <a:lnTo>
+                  <a:pt x="2622707" y="258737"/>
+                </a:lnTo>
+                <a:lnTo>
+                  <a:pt x="2661852" y="252555"/>
+                </a:lnTo>
+                <a:lnTo>
+                  <a:pt x="2700996" y="246520"/>
+                </a:lnTo>
+                <a:lnTo>
+                  <a:pt x="2740141" y="240625"/>
+                </a:lnTo>
+                <a:lnTo>
+                  <a:pt x="2779286" y="234866"/>
+                </a:lnTo>
+                <a:lnTo>
+                  <a:pt x="2818431" y="229239"/>
+                </a:lnTo>
+                <a:lnTo>
+                  <a:pt x="2857576" y="223738"/>
+                </a:lnTo>
+                <a:lnTo>
+                  <a:pt x="2896721" y="218360"/>
+                </a:lnTo>
+                <a:lnTo>
+                  <a:pt x="2935866" y="213100"/>
+                </a:lnTo>
+                <a:lnTo>
+                  <a:pt x="2975011" y="207955"/>
+                </a:lnTo>
+                <a:lnTo>
+                  <a:pt x="3014155" y="202921"/>
+                </a:lnTo>
+                <a:lnTo>
+                  <a:pt x="3053300" y="197994"/>
+                </a:lnTo>
+                <a:lnTo>
+                  <a:pt x="3092445" y="193171"/>
+                </a:lnTo>
+                <a:lnTo>
+                  <a:pt x="3131590" y="188448"/>
+                </a:lnTo>
+                <a:lnTo>
+                  <a:pt x="3170735" y="183823"/>
+                </a:lnTo>
+                <a:lnTo>
+                  <a:pt x="3209880" y="179293"/>
+                </a:lnTo>
+                <a:lnTo>
+                  <a:pt x="3249025" y="174854"/>
+                </a:lnTo>
+                <a:lnTo>
+                  <a:pt x="3288170" y="170504"/>
+                </a:lnTo>
+                <a:lnTo>
+                  <a:pt x="3327315" y="166240"/>
+                </a:lnTo>
+                <a:lnTo>
+                  <a:pt x="3366459" y="162060"/>
+                </a:lnTo>
+                <a:lnTo>
+                  <a:pt x="3405604" y="157961"/>
+                </a:lnTo>
+                <a:lnTo>
+                  <a:pt x="3444749" y="153940"/>
+                </a:lnTo>
+                <a:lnTo>
+                  <a:pt x="3483894" y="149997"/>
+                </a:lnTo>
+                <a:lnTo>
+                  <a:pt x="3523039" y="146128"/>
+                </a:lnTo>
+                <a:lnTo>
+                  <a:pt x="3562184" y="142331"/>
+                </a:lnTo>
+                <a:lnTo>
+                  <a:pt x="3601329" y="138604"/>
+                </a:lnTo>
+                <a:lnTo>
+                  <a:pt x="3640474" y="134946"/>
+                </a:lnTo>
+                <a:lnTo>
+                  <a:pt x="3679618" y="131354"/>
+                </a:lnTo>
+                <a:lnTo>
+                  <a:pt x="3718763" y="127827"/>
+                </a:lnTo>
+                <a:lnTo>
+                  <a:pt x="3757908" y="124363"/>
+                </a:lnTo>
+                <a:lnTo>
+                  <a:pt x="3797053" y="120960"/>
+                </a:lnTo>
+                <a:lnTo>
+                  <a:pt x="3836198" y="117617"/>
+                </a:lnTo>
+                <a:lnTo>
+                  <a:pt x="3875343" y="114332"/>
+                </a:lnTo>
+                <a:lnTo>
+                  <a:pt x="3914488" y="111104"/>
+                </a:lnTo>
+                <a:lnTo>
+                  <a:pt x="3953633" y="107930"/>
+                </a:lnTo>
+                <a:lnTo>
+                  <a:pt x="3992778" y="104811"/>
+                </a:lnTo>
+                <a:lnTo>
+                  <a:pt x="4031922" y="101744"/>
+                </a:lnTo>
+                <a:lnTo>
+                  <a:pt x="4071067" y="98727"/>
+                </a:lnTo>
+                <a:lnTo>
+                  <a:pt x="4110212" y="95761"/>
+                </a:lnTo>
+                <a:lnTo>
+                  <a:pt x="4149357" y="92843"/>
+                </a:lnTo>
+                <a:lnTo>
+                  <a:pt x="4188502" y="89973"/>
+                </a:lnTo>
+                <a:lnTo>
+                  <a:pt x="4227647" y="87149"/>
+                </a:lnTo>
+                <a:lnTo>
+                  <a:pt x="4266792" y="84370"/>
+                </a:lnTo>
+                <a:lnTo>
+                  <a:pt x="4305937" y="81635"/>
+                </a:lnTo>
+                <a:lnTo>
+                  <a:pt x="4345082" y="78943"/>
+                </a:lnTo>
+                <a:lnTo>
+                  <a:pt x="4384226" y="76293"/>
+                </a:lnTo>
+                <a:lnTo>
+                  <a:pt x="4423371" y="73684"/>
+                </a:lnTo>
+                <a:lnTo>
+                  <a:pt x="4462516" y="71115"/>
+                </a:lnTo>
+                <a:lnTo>
+                  <a:pt x="4501661" y="68585"/>
+                </a:lnTo>
+                <a:lnTo>
+                  <a:pt x="4540806" y="66094"/>
+                </a:lnTo>
+                <a:lnTo>
+                  <a:pt x="4579951" y="63639"/>
+                </a:lnTo>
+                <a:lnTo>
+                  <a:pt x="4619096" y="61222"/>
+                </a:lnTo>
+                <a:lnTo>
+                  <a:pt x="4658241" y="58840"/>
+                </a:lnTo>
+                <a:lnTo>
+                  <a:pt x="4697385" y="56493"/>
+                </a:lnTo>
+                <a:lnTo>
+                  <a:pt x="4736530" y="54181"/>
+                </a:lnTo>
+                <a:lnTo>
+                  <a:pt x="4775675" y="51902"/>
+                </a:lnTo>
+                <a:lnTo>
+                  <a:pt x="4814820" y="49655"/>
+                </a:lnTo>
+                <a:lnTo>
+                  <a:pt x="4853965" y="47441"/>
+                </a:lnTo>
+                <a:lnTo>
+                  <a:pt x="4893110" y="45258"/>
+                </a:lnTo>
+                <a:lnTo>
+                  <a:pt x="4932255" y="43106"/>
+                </a:lnTo>
+                <a:lnTo>
+                  <a:pt x="4971400" y="40983"/>
+                </a:lnTo>
+                <a:lnTo>
+                  <a:pt x="5010545" y="38890"/>
+                </a:lnTo>
+                <a:lnTo>
+                  <a:pt x="5049689" y="36826"/>
+                </a:lnTo>
+                <a:lnTo>
+                  <a:pt x="5088834" y="34790"/>
+                </a:lnTo>
+                <a:lnTo>
+                  <a:pt x="5127979" y="32782"/>
+                </a:lnTo>
+                <a:lnTo>
+                  <a:pt x="5167124" y="30801"/>
+                </a:lnTo>
+                <a:lnTo>
+                  <a:pt x="5206269" y="28847"/>
+                </a:lnTo>
+                <a:lnTo>
+                  <a:pt x="5245414" y="26918"/>
+                </a:lnTo>
+                <a:lnTo>
+                  <a:pt x="5284559" y="25015"/>
+                </a:lnTo>
+                <a:lnTo>
+                  <a:pt x="5323704" y="23137"/>
+                </a:lnTo>
+                <a:lnTo>
+                  <a:pt x="5362848" y="21283"/>
+                </a:lnTo>
+                <a:lnTo>
+                  <a:pt x="5401993" y="19454"/>
+                </a:lnTo>
+                <a:lnTo>
+                  <a:pt x="5441138" y="17648"/>
+                </a:lnTo>
+                <a:lnTo>
+                  <a:pt x="5480283" y="15865"/>
+                </a:lnTo>
+                <a:lnTo>
+                  <a:pt x="5519428" y="14105"/>
+                </a:lnTo>
+                <a:lnTo>
+                  <a:pt x="5558573" y="12367"/>
+                </a:lnTo>
+                <a:lnTo>
+                  <a:pt x="5597718" y="10650"/>
+                </a:lnTo>
+                <a:lnTo>
+                  <a:pt x="5636863" y="8956"/>
+                </a:lnTo>
+                <a:lnTo>
+                  <a:pt x="5676008" y="7282"/>
+                </a:lnTo>
+                <a:lnTo>
+                  <a:pt x="5715152" y="5629"/>
+                </a:lnTo>
+                <a:lnTo>
+                  <a:pt x="5754297" y="3996"/>
+                </a:lnTo>
+                <a:lnTo>
+                  <a:pt x="5793442" y="2383"/>
+                </a:lnTo>
+                <a:lnTo>
+                  <a:pt x="5832587" y="789"/>
+                </a:lnTo>
+                <a:lnTo>
+                  <a:pt x="5852160" y="0"/>
+                </a:lnTo>
+              </a:path>
+            </a:pathLst>
+          </a:custGeom>
+          <a:noFill/>
+          <a:ln w="43180">
+            <a:solidFill>
+              <a:srgbClr val="8EDBD4"/>
+            </a:solidFill>
+          </a:ln>
+          <a:effectLst/>
+        </p:spPr>
+        <p:txBody>
+          <a:bodyPr rtlCol="0" anchor="ctr"/>
+          <a:lstStyle/>
+          <a:p>
+            <a:pPr algn="ctr"/>
           </a:p>
         </p:txBody>
       </p:sp>
       <p:cxnSp>
         <p:nvCxnSpPr>
-          <p:cNvPr id="7" name="arrow 5" descr="sci-ppt:obj-005"/>
+          <p:cNvPr id="42" name="A-E05 line 40" descr="sci-ppt:o040"/>
           <p:cNvCxnSpPr/>
           <p:nvPr/>
         </p:nvCxnSpPr>
         <p:spPr>
           <a:xfrm>
-            <a:off x="1792224" y="1645920"/>
-            <a:ext cx="517262" cy="517262"/>
+            <a:off x="914400" y="1763485"/>
+            <a:ext cx="5852160" cy="0"/>
           </a:xfrm>
           <a:prstGeom prst="line">
             <a:avLst/>
           </a:prstGeom>
-          <a:ln w="21590">
+          <a:ln w="16510">
             <a:solidFill>
-              <a:srgbClr val="8EDBD4"/>
+              <a:srgbClr val="B4C7D2"/>
             </a:solidFill>
-            <a:headEnd type="none" w="med" len="med"/>
-            <a:tailEnd type="triangle" w="med" len="med"/>
+            <a:prstDash val="dash"/>
           </a:ln>
           <a:effectLst/>
         </p:spPr>
       </p:cxnSp>
       <p:sp>
         <p:nvSpPr>
-          <p:cNvPr id="8" name="text 6" descr="sci-ppt:obj-006"/>
+          <p:cNvPr id="43" name="A-E05 text 41" descr="sci-ppt:o041"/>
           <p:cNvSpPr txBox="1"/>
           <p:nvPr/>
         </p:nvSpPr>
         <p:spPr>
           <a:xfrm>
-            <a:off x="2304288" y="2139696"/>
-            <a:ext cx="822960" cy="310896"/>
+            <a:off x="3588512" y="1698171"/>
+            <a:ext cx="1280160" cy="223900"/>
           </a:xfrm>
           <a:prstGeom prst="rect">
             <a:avLst/>
@@ -3304,7 +4738,7 @@
           <a:effectLst/>
         </p:spPr>
         <p:txBody>
-          <a:bodyPr wrap="none" lIns="0" rIns="0" tIns="0" bIns="0" anchor="ctr">
+          <a:bodyPr wrap="none" lIns="18288" rIns="18288" tIns="18288" bIns="18288" anchor="t">
             <a:spAutoFit/>
           </a:bodyPr>
           <a:lstStyle/>
@@ -3315,113 +4749,227 @@
               </a:spcAft>
             </a:pPr>
             <a:r>
-              <a:rPr sz="1296" b="0" i="0">
+              <a:rPr sz="1150" b="0" i="0">
+                <a:solidFill>
+                  <a:srgbClr val="B4C7D2"/>
+                </a:solidFill>
+                <a:latin typeface="Arial"/>
+              </a:rPr>
+              <a:t>limit 5/2</a:t>
+            </a:r>
+          </a:p>
+        </p:txBody>
+      </p:sp>
+      <p:sp>
+        <p:nvSpPr>
+          <p:cNvPr id="44" name="A-E05 ellipse 42" descr="sci-ppt:o042"/>
+          <p:cNvSpPr/>
+          <p:nvPr/>
+        </p:nvSpPr>
+        <p:spPr>
+          <a:xfrm>
+            <a:off x="4092447" y="2126266"/>
+            <a:ext cx="146304" cy="146304"/>
+          </a:xfrm>
+          <a:prstGeom prst="ellipse">
+            <a:avLst/>
+          </a:prstGeom>
+          <a:solidFill>
+            <a:srgbClr val="F2B880"/>
+          </a:solidFill>
+          <a:ln w="12700">
+            <a:solidFill>
+              <a:srgbClr val="F2B880"/>
+            </a:solidFill>
+          </a:ln>
+          <a:effectLst/>
+        </p:spPr>
+        <p:txBody>
+          <a:bodyPr rtlCol="0" anchor="ctr"/>
+          <a:lstStyle/>
+          <a:p>
+            <a:pPr algn="ctr"/>
+          </a:p>
+        </p:txBody>
+      </p:sp>
+      <p:sp>
+        <p:nvSpPr>
+          <p:cNvPr id="45" name="A-E05 text 43" descr="sci-ppt:o043"/>
+          <p:cNvSpPr txBox="1"/>
+          <p:nvPr/>
+        </p:nvSpPr>
+        <p:spPr>
+          <a:xfrm>
+            <a:off x="4165600" y="2519458"/>
+            <a:ext cx="2377440" cy="402081"/>
+          </a:xfrm>
+          <a:prstGeom prst="rect">
+            <a:avLst/>
+          </a:prstGeom>
+          <a:noFill/>
+          <a:effectLst/>
+        </p:spPr>
+        <p:txBody>
+          <a:bodyPr wrap="none" lIns="18288" rIns="18288" tIns="18288" bIns="18288" anchor="t">
+            <a:spAutoFit/>
+          </a:bodyPr>
+          <a:lstStyle/>
+          <a:p>
+            <a:pPr algn="l">
+              <a:spcAft>
+                <a:spcPts val="0"/>
+              </a:spcAft>
+            </a:pPr>
+            <a:r>
+              <a:rPr sz="1150" b="0" i="0">
+                <a:solidFill>
+                  <a:srgbClr val="F2B880"/>
+                </a:solidFill>
+                <a:latin typeface="Arial"/>
+              </a:rPr>
+              <a:t>R/R_ref = 6:</a:t>
+            </a:r>
+          </a:p>
+          <a:p>
+            <a:pPr algn="l">
+              <a:spcAft>
+                <a:spcPts val="0"/>
+              </a:spcAft>
+            </a:pPr>
+            <a:r>
+              <a:rPr sz="1150" b="0" i="0">
+                <a:solidFill>
+                  <a:srgbClr val="F2B880"/>
+                </a:solidFill>
+                <a:latin typeface="Arial"/>
+              </a:rPr>
+              <a:t>2.1663 G_g = 43325.6 Pa</a:t>
+            </a:r>
+          </a:p>
+        </p:txBody>
+      </p:sp>
+      <p:sp>
+        <p:nvSpPr>
+          <p:cNvPr id="46" name="A-E05 round_rect 44" descr="sci-ppt:o044"/>
+          <p:cNvSpPr/>
+          <p:nvPr/>
+        </p:nvSpPr>
+        <p:spPr>
+          <a:xfrm>
+            <a:off x="7040880" y="1371600"/>
+            <a:ext cx="4800600" cy="3657600"/>
+          </a:xfrm>
+          <a:prstGeom prst="roundRect">
+            <a:avLst/>
+          </a:prstGeom>
+          <a:solidFill>
+            <a:srgbClr val="213E4B"/>
+          </a:solidFill>
+          <a:ln w="20320">
+            <a:solidFill>
+              <a:srgbClr val="8EDBD4"/>
+            </a:solidFill>
+          </a:ln>
+          <a:effectLst/>
+        </p:spPr>
+        <p:txBody>
+          <a:bodyPr rtlCol="0" anchor="ctr"/>
+          <a:lstStyle/>
+          <a:p>
+            <a:pPr algn="ctr"/>
+          </a:p>
+        </p:txBody>
+      </p:sp>
+      <p:sp>
+        <p:nvSpPr>
+          <p:cNvPr id="47" name="A-E05 text 45" descr="sci-ppt:o045"/>
+          <p:cNvSpPr txBox="1"/>
+          <p:nvPr/>
+        </p:nvSpPr>
+        <p:spPr>
+          <a:xfrm>
+            <a:off x="7150608" y="1426464"/>
+            <a:ext cx="4581144" cy="254889"/>
+          </a:xfrm>
+          <a:prstGeom prst="rect">
+            <a:avLst/>
+          </a:prstGeom>
+          <a:noFill/>
+          <a:effectLst/>
+        </p:spPr>
+        <p:txBody>
+          <a:bodyPr wrap="none" lIns="18288" rIns="18288" tIns="18288" bIns="18288" anchor="t">
+            <a:spAutoFit/>
+          </a:bodyPr>
+          <a:lstStyle/>
+          <a:p>
+            <a:pPr algn="l">
+              <a:spcAft>
+                <a:spcPts val="0"/>
+              </a:spcAft>
+            </a:pPr>
+            <a:r>
+              <a:rPr sz="1350" b="1" i="0">
+                <a:solidFill>
+                  <a:srgbClr val="8EDBD4"/>
+                </a:solidFill>
+                <a:latin typeface="Arial"/>
+              </a:rPr>
+              <a:t>Closed form</a:t>
+            </a:r>
+          </a:p>
+        </p:txBody>
+      </p:sp>
+      <p:sp>
+        <p:nvSpPr>
+          <p:cNvPr id="48" name="A-E05 text 46" descr="sci-ppt:o046"/>
+          <p:cNvSpPr txBox="1"/>
+          <p:nvPr/>
+        </p:nvSpPr>
+        <p:spPr>
+          <a:xfrm>
+            <a:off x="7178040" y="1828800"/>
+            <a:ext cx="4572000" cy="223900"/>
+          </a:xfrm>
+          <a:prstGeom prst="rect">
+            <a:avLst/>
+          </a:prstGeom>
+          <a:noFill/>
+          <a:effectLst/>
+        </p:spPr>
+        <p:txBody>
+          <a:bodyPr wrap="none" lIns="18288" rIns="18288" tIns="18288" bIns="18288" anchor="t">
+            <a:spAutoFit/>
+          </a:bodyPr>
+          <a:lstStyle/>
+          <a:p>
+            <a:pPr algn="l">
+              <a:spcAft>
+                <a:spcPts val="0"/>
+              </a:spcAft>
+            </a:pPr>
+            <a:r>
+              <a:rPr sz="1150" b="1" i="0">
                 <a:solidFill>
                   <a:srgbClr val="E7F0F3"/>
                 </a:solidFill>
                 <a:latin typeface="Arial"/>
               </a:rPr>
-              <a:t>r₀</a:t>
-            </a:r>
-          </a:p>
-        </p:txBody>
-      </p:sp>
-      <p:sp>
-        <p:nvSpPr>
-          <p:cNvPr id="9" name="ellipse 7" descr="sci-ppt:obj-007"/>
-          <p:cNvSpPr/>
-          <p:nvPr/>
-        </p:nvSpPr>
-        <p:spPr>
-          <a:xfrm>
-            <a:off x="4682139" y="750219"/>
-            <a:ext cx="1791401" cy="1791401"/>
-          </a:xfrm>
-          <a:prstGeom prst="ellipse">
-            <a:avLst/>
-          </a:prstGeom>
-          <a:noFill/>
-          <a:ln w="17780">
-            <a:solidFill>
-              <a:srgbClr val="B4C7D2"/>
-            </a:solidFill>
-          </a:ln>
-          <a:effectLst/>
-        </p:spPr>
-        <p:txBody>
-          <a:bodyPr rtlCol="0" anchor="ctr"/>
-          <a:lstStyle/>
-          <a:p>
-            <a:pPr algn="ctr"/>
-          </a:p>
-        </p:txBody>
-      </p:sp>
-      <p:sp>
-        <p:nvSpPr>
-          <p:cNvPr id="10" name="ellipse 8" descr="sci-ppt:obj-008"/>
-          <p:cNvSpPr/>
-          <p:nvPr/>
-        </p:nvSpPr>
-        <p:spPr>
-          <a:xfrm>
-            <a:off x="4864608" y="932688"/>
-            <a:ext cx="1426464" cy="1426464"/>
-          </a:xfrm>
-          <a:prstGeom prst="ellipse">
-            <a:avLst/>
-          </a:prstGeom>
-          <a:solidFill>
-            <a:srgbClr val="213E4B"/>
-          </a:solidFill>
-          <a:ln w="17780">
-            <a:solidFill>
-              <a:srgbClr val="B4C7D2"/>
-            </a:solidFill>
-          </a:ln>
-          <a:effectLst/>
-        </p:spPr>
-        <p:txBody>
-          <a:bodyPr rtlCol="0" anchor="ctr"/>
-          <a:lstStyle/>
-          <a:p>
-            <a:pPr algn="ctr"/>
-          </a:p>
-        </p:txBody>
-      </p:sp>
-      <p:cxnSp>
-        <p:nvCxnSpPr>
-          <p:cNvPr id="11" name="arrow 9" descr="sci-ppt:obj-009"/>
-          <p:cNvCxnSpPr/>
-          <p:nvPr/>
-        </p:nvCxnSpPr>
-        <p:spPr>
-          <a:xfrm>
-            <a:off x="5577840" y="1645920"/>
-            <a:ext cx="713232" cy="0"/>
-          </a:xfrm>
-          <a:prstGeom prst="line">
-            <a:avLst/>
-          </a:prstGeom>
-          <a:ln w="21590">
-            <a:solidFill>
-              <a:srgbClr val="8EDBD4"/>
-            </a:solidFill>
-            <a:headEnd type="none" w="med" len="med"/>
-            <a:tailEnd type="triangle" w="med" len="med"/>
-          </a:ln>
-          <a:effectLst/>
-        </p:spPr>
-      </p:cxnSp>
-      <p:sp>
-        <p:nvSpPr>
-          <p:cNvPr id="12" name="text 10" descr="sci-ppt:obj-010"/>
+              <a:t>pₑₗ = 2G_g ∫ (1 + q³) dq   (q: R_ref/R → 1)</a:t>
+            </a:r>
+          </a:p>
+        </p:txBody>
+      </p:sp>
+      <p:sp>
+        <p:nvSpPr>
+          <p:cNvPr id="49" name="A-E05 text 47" descr="sci-ppt:o047"/>
           <p:cNvSpPr txBox="1"/>
           <p:nvPr/>
         </p:nvSpPr>
         <p:spPr>
           <a:xfrm>
-            <a:off x="5952744" y="1271016"/>
-            <a:ext cx="640080" cy="310896"/>
+            <a:off x="7178040" y="2331720"/>
+            <a:ext cx="4572000" cy="239395"/>
           </a:xfrm>
           <a:prstGeom prst="rect">
             <a:avLst/>
@@ -3430,7 +4978,7 @@
           <a:effectLst/>
         </p:spPr>
         <p:txBody>
-          <a:bodyPr wrap="none" lIns="0" rIns="0" tIns="0" bIns="0" anchor="ctr">
+          <a:bodyPr wrap="none" lIns="18288" rIns="18288" tIns="18288" bIns="18288" anchor="t">
             <a:spAutoFit/>
           </a:bodyPr>
           <a:lstStyle/>
@@ -3441,51 +4989,27 @@
               </a:spcAft>
             </a:pPr>
             <a:r>
-              <a:rPr sz="1296" b="0" i="0">
+              <a:rPr sz="1250" b="1" i="0">
                 <a:solidFill>
                   <a:srgbClr val="E7F0F3"/>
                 </a:solidFill>
                 <a:latin typeface="Arial"/>
               </a:rPr>
-              <a:t>R</a:t>
-            </a:r>
-          </a:p>
-        </p:txBody>
-      </p:sp>
-      <p:cxnSp>
-        <p:nvCxnSpPr>
-          <p:cNvPr id="13" name="arrow 11" descr="sci-ppt:obj-011"/>
-          <p:cNvCxnSpPr/>
-          <p:nvPr/>
-        </p:nvCxnSpPr>
-        <p:spPr>
-          <a:xfrm>
-            <a:off x="5577840" y="1645920"/>
-            <a:ext cx="633355" cy="633355"/>
-          </a:xfrm>
-          <a:prstGeom prst="line">
-            <a:avLst/>
-          </a:prstGeom>
-          <a:ln w="21590">
-            <a:solidFill>
-              <a:srgbClr val="8EDBD4"/>
-            </a:solidFill>
-            <a:headEnd type="none" w="med" len="med"/>
-            <a:tailEnd type="triangle" w="med" len="med"/>
-          </a:ln>
-          <a:effectLst/>
-        </p:spPr>
-      </p:cxnSp>
-      <p:sp>
-        <p:nvSpPr>
-          <p:cNvPr id="14" name="text 12" descr="sci-ppt:obj-012"/>
+              <a:t>= 2G_g [q + q⁴/4]</a:t>
+            </a:r>
+          </a:p>
+        </p:txBody>
+      </p:sp>
+      <p:sp>
+        <p:nvSpPr>
+          <p:cNvPr id="50" name="A-E05 text 48" descr="sci-ppt:o048"/>
           <p:cNvSpPr txBox="1"/>
           <p:nvPr/>
         </p:nvSpPr>
         <p:spPr>
           <a:xfrm>
-            <a:off x="6373368" y="2231136"/>
-            <a:ext cx="640080" cy="310896"/>
+            <a:off x="7178040" y="2834640"/>
+            <a:ext cx="4572000" cy="247142"/>
           </a:xfrm>
           <a:prstGeom prst="rect">
             <a:avLst/>
@@ -3494,7 +5018,7 @@
           <a:effectLst/>
         </p:spPr>
         <p:txBody>
-          <a:bodyPr wrap="none" lIns="0" rIns="0" tIns="0" bIns="0" anchor="ctr">
+          <a:bodyPr wrap="none" lIns="18288" rIns="18288" tIns="18288" bIns="18288" anchor="t">
             <a:spAutoFit/>
           </a:bodyPr>
           <a:lstStyle/>
@@ -3505,51 +5029,123 @@
               </a:spcAft>
             </a:pPr>
             <a:r>
-              <a:rPr sz="1296" b="0" i="0">
+              <a:rPr sz="1300" b="1" i="0">
+                <a:solidFill>
+                  <a:srgbClr val="F2B880"/>
+                </a:solidFill>
+                <a:latin typeface="Arial"/>
+              </a:rPr>
+              <a:t>= (G_g/2)[5 − 4R_ref/R − (R_ref/R)⁴]</a:t>
+            </a:r>
+          </a:p>
+        </p:txBody>
+      </p:sp>
+      <p:sp>
+        <p:nvSpPr>
+          <p:cNvPr id="51" name="A-E05 text 49" descr="sci-ppt:o049"/>
+          <p:cNvSpPr txBox="1"/>
+          <p:nvPr/>
+        </p:nvSpPr>
+        <p:spPr>
+          <a:xfrm>
+            <a:off x="7178040" y="3474720"/>
+            <a:ext cx="4572000" cy="417576"/>
+          </a:xfrm>
+          <a:prstGeom prst="rect">
+            <a:avLst/>
+          </a:prstGeom>
+          <a:noFill/>
+          <a:effectLst/>
+        </p:spPr>
+        <p:txBody>
+          <a:bodyPr wrap="none" lIns="18288" rIns="18288" tIns="18288" bIns="18288" anchor="t">
+            <a:spAutoFit/>
+          </a:bodyPr>
+          <a:lstStyle/>
+          <a:p>
+            <a:pPr algn="l">
+              <a:spcAft>
+                <a:spcPts val="0"/>
+              </a:spcAft>
+            </a:pPr>
+            <a:r>
+              <a:rPr sz="1200" b="0" i="0">
+                <a:solidFill>
+                  <a:srgbClr val="B4C7D2"/>
+                </a:solidFill>
+                <a:latin typeface="Arial"/>
+              </a:rPr>
+              <a:t>Obtained from the stretch field, not a guessed constant</a:t>
+            </a:r>
+          </a:p>
+          <a:p>
+            <a:pPr algn="l">
+              <a:spcAft>
+                <a:spcPts val="0"/>
+              </a:spcAft>
+            </a:pPr>
+            <a:r>
+              <a:rPr sz="1200" b="0" i="0">
+                <a:solidFill>
+                  <a:srgbClr val="B4C7D2"/>
+                </a:solidFill>
+                <a:latin typeface="Arial"/>
+              </a:rPr>
+              <a:t>pressure.</a:t>
+            </a:r>
+          </a:p>
+        </p:txBody>
+      </p:sp>
+      <p:sp>
+        <p:nvSpPr>
+          <p:cNvPr id="52" name="A-E05 text 50" descr="sci-ppt:o050"/>
+          <p:cNvSpPr txBox="1"/>
+          <p:nvPr/>
+        </p:nvSpPr>
+        <p:spPr>
+          <a:xfrm>
+            <a:off x="914400" y="5733288"/>
+            <a:ext cx="10972800" cy="239395"/>
+          </a:xfrm>
+          <a:prstGeom prst="rect">
+            <a:avLst/>
+          </a:prstGeom>
+          <a:noFill/>
+          <a:effectLst/>
+        </p:spPr>
+        <p:txBody>
+          <a:bodyPr wrap="none" lIns="18288" rIns="18288" tIns="18288" bIns="18288" anchor="t">
+            <a:spAutoFit/>
+          </a:bodyPr>
+          <a:lstStyle/>
+          <a:p>
+            <a:pPr algn="l">
+              <a:spcAft>
+                <a:spcPts val="0"/>
+              </a:spcAft>
+            </a:pPr>
+            <a:r>
+              <a:rPr sz="1250" b="0" i="0">
                 <a:solidFill>
                   <a:srgbClr val="E7F0F3"/>
                 </a:solidFill>
                 <a:latin typeface="Arial"/>
               </a:rPr>
-              <a:t>r</a:t>
-            </a:r>
-          </a:p>
-        </p:txBody>
-      </p:sp>
-      <p:cxnSp>
-        <p:nvCxnSpPr>
-          <p:cNvPr id="15" name="arrow 13" descr="sci-ppt:obj-013"/>
-          <p:cNvCxnSpPr/>
-          <p:nvPr/>
-        </p:nvCxnSpPr>
-        <p:spPr>
-          <a:xfrm>
-            <a:off x="2697480" y="1645920"/>
-            <a:ext cx="1691640" cy="0"/>
-          </a:xfrm>
-          <a:prstGeom prst="line">
-            <a:avLst/>
-          </a:prstGeom>
-          <a:ln w="21590">
-            <a:solidFill>
-              <a:srgbClr val="8EDBD4"/>
-            </a:solidFill>
-            <a:headEnd type="none" w="med" len="med"/>
-            <a:tailEnd type="triangle" w="med" len="med"/>
-          </a:ln>
-          <a:effectLst/>
-        </p:spPr>
-      </p:cxnSp>
-      <p:sp>
-        <p:nvSpPr>
-          <p:cNvPr id="16" name="text 14" descr="sci-ppt:obj-014"/>
+              <a:t>Resistance rises steeply at first and saturates near 5G_g/2 when the cavity is many times its reference size.</a:t>
+            </a:r>
+          </a:p>
+        </p:txBody>
+      </p:sp>
+      <p:sp>
+        <p:nvSpPr>
+          <p:cNvPr id="53" name="A-E05 text 51" descr="sci-ppt:o051"/>
           <p:cNvSpPr txBox="1"/>
           <p:nvPr/>
         </p:nvSpPr>
         <p:spPr>
           <a:xfrm>
-            <a:off x="2834640" y="1143000"/>
-            <a:ext cx="2286000" cy="310896"/>
+            <a:off x="320040" y="6510528"/>
+            <a:ext cx="11521440" cy="200660"/>
           </a:xfrm>
           <a:prstGeom prst="rect">
             <a:avLst/>
@@ -3558,7 +5154,7 @@
           <a:effectLst/>
         </p:spPr>
         <p:txBody>
-          <a:bodyPr wrap="none" lIns="0" rIns="0" tIns="0" bIns="0" anchor="ctr">
+          <a:bodyPr wrap="none" lIns="18288" rIns="18288" tIns="18288" bIns="18288" anchor="t">
             <a:spAutoFit/>
           </a:bodyPr>
           <a:lstStyle/>
@@ -3569,573 +5165,13 @@
               </a:spcAft>
             </a:pPr>
             <a:r>
-              <a:rPr sz="1296" b="0" i="0">
+              <a:rPr sz="1000" b="0" i="0">
                 <a:solidFill>
-                  <a:srgbClr val="E7F0F3"/>
+                  <a:srgbClr val="B4C7D2"/>
                 </a:solidFill>
                 <a:latin typeface="Arial"/>
               </a:rPr>
-              <a:t>Material map</a:t>
-            </a:r>
-          </a:p>
-        </p:txBody>
-      </p:sp>
-      <p:sp>
-        <p:nvSpPr>
-          <p:cNvPr id="17" name="text 15" descr="sci-ppt:obj-015"/>
-          <p:cNvSpPr txBox="1"/>
-          <p:nvPr/>
-        </p:nvSpPr>
-        <p:spPr>
-          <a:xfrm>
-            <a:off x="1005840" y="2578608"/>
-            <a:ext cx="2286000" cy="310896"/>
-          </a:xfrm>
-          <a:prstGeom prst="rect">
-            <a:avLst/>
-          </a:prstGeom>
-          <a:noFill/>
-          <a:effectLst/>
-        </p:spPr>
-        <p:txBody>
-          <a:bodyPr wrap="none" lIns="0" rIns="0" tIns="0" bIns="0" anchor="ctr">
-            <a:spAutoFit/>
-          </a:bodyPr>
-          <a:lstStyle/>
-          <a:p>
-            <a:pPr algn="l">
-              <a:spcAft>
-                <a:spcPts val="0"/>
-              </a:spcAft>
-            </a:pPr>
-            <a:r>
-              <a:rPr sz="1296" b="0" i="0">
-                <a:solidFill>
-                  <a:srgbClr val="E7F0F3"/>
-                </a:solidFill>
-                <a:latin typeface="Arial"/>
-              </a:rPr>
-              <a:t>Reference</a:t>
-            </a:r>
-          </a:p>
-        </p:txBody>
-      </p:sp>
-      <p:sp>
-        <p:nvSpPr>
-          <p:cNvPr id="18" name="text 16" descr="sci-ppt:obj-016"/>
-          <p:cNvSpPr txBox="1"/>
-          <p:nvPr/>
-        </p:nvSpPr>
-        <p:spPr>
-          <a:xfrm>
-            <a:off x="4846320" y="2660904"/>
-            <a:ext cx="3383280" cy="310896"/>
-          </a:xfrm>
-          <a:prstGeom prst="rect">
-            <a:avLst/>
-          </a:prstGeom>
-          <a:noFill/>
-          <a:effectLst/>
-        </p:spPr>
-        <p:txBody>
-          <a:bodyPr wrap="none" lIns="0" rIns="0" tIns="0" bIns="0" anchor="ctr">
-            <a:spAutoFit/>
-          </a:bodyPr>
-          <a:lstStyle/>
-          <a:p>
-            <a:pPr algn="l">
-              <a:spcAft>
-                <a:spcPts val="0"/>
-              </a:spcAft>
-            </a:pPr>
-            <a:r>
-              <a:rPr sz="1296" b="0" i="0">
-                <a:solidFill>
-                  <a:srgbClr val="E7F0F3"/>
-                </a:solidFill>
-                <a:latin typeface="Arial"/>
-              </a:rPr>
-              <a:t>Deformed: λr , λθ</a:t>
-            </a:r>
-          </a:p>
-        </p:txBody>
-      </p:sp>
-      <p:sp>
-        <p:nvSpPr>
-          <p:cNvPr id="19" name="text 17" descr="sci-ppt:obj-017"/>
-          <p:cNvSpPr txBox="1"/>
-          <p:nvPr/>
-        </p:nvSpPr>
-        <p:spPr>
-          <a:xfrm>
-            <a:off x="6839712" y="777240"/>
-            <a:ext cx="1645920" cy="310896"/>
-          </a:xfrm>
-          <a:prstGeom prst="rect">
-            <a:avLst/>
-          </a:prstGeom>
-          <a:noFill/>
-          <a:effectLst/>
-        </p:spPr>
-        <p:txBody>
-          <a:bodyPr wrap="none" lIns="0" rIns="0" tIns="0" bIns="0" anchor="ctr">
-            <a:spAutoFit/>
-          </a:bodyPr>
-          <a:lstStyle/>
-          <a:p>
-            <a:pPr algn="l">
-              <a:spcAft>
-                <a:spcPts val="0"/>
-              </a:spcAft>
-            </a:pPr>
-            <a:r>
-              <a:rPr sz="1296" b="0" i="0">
-                <a:solidFill>
-                  <a:srgbClr val="E7F0F3"/>
-                </a:solidFill>
-                <a:latin typeface="Arial"/>
-              </a:rPr>
-              <a:t>Gg , ηg</a:t>
-            </a:r>
-          </a:p>
-        </p:txBody>
-      </p:sp>
-      <p:sp>
-        <p:nvSpPr>
-          <p:cNvPr id="20" name="text 18" descr="sci-ppt:obj-018"/>
-          <p:cNvSpPr txBox="1"/>
-          <p:nvPr/>
-        </p:nvSpPr>
-        <p:spPr>
-          <a:xfrm>
-            <a:off x="6839712" y="1207008"/>
-            <a:ext cx="1828800" cy="310896"/>
-          </a:xfrm>
-          <a:prstGeom prst="rect">
-            <a:avLst/>
-          </a:prstGeom>
-          <a:noFill/>
-          <a:effectLst/>
-        </p:spPr>
-        <p:txBody>
-          <a:bodyPr wrap="none" lIns="0" rIns="0" tIns="0" bIns="0" anchor="ctr">
-            <a:spAutoFit/>
-          </a:bodyPr>
-          <a:lstStyle/>
-          <a:p>
-            <a:pPr algn="l">
-              <a:spcAft>
-                <a:spcPts val="0"/>
-              </a:spcAft>
-            </a:pPr>
-            <a:r>
-              <a:rPr sz="1296" b="0" i="0">
-                <a:solidFill>
-                  <a:srgbClr val="E7F0F3"/>
-                </a:solidFill>
-                <a:latin typeface="Arial"/>
-              </a:rPr>
-              <a:t>σrr , σθθ</a:t>
-            </a:r>
-          </a:p>
-        </p:txBody>
-      </p:sp>
-      <p:sp>
-        <p:nvSpPr>
-          <p:cNvPr id="21" name="text 19" descr="sci-ppt:obj-019"/>
-          <p:cNvSpPr txBox="1"/>
-          <p:nvPr/>
-        </p:nvSpPr>
-        <p:spPr>
-          <a:xfrm>
-            <a:off x="6839712" y="1645920"/>
-            <a:ext cx="1371600" cy="310896"/>
-          </a:xfrm>
-          <a:prstGeom prst="rect">
-            <a:avLst/>
-          </a:prstGeom>
-          <a:noFill/>
-          <a:effectLst/>
-        </p:spPr>
-        <p:txBody>
-          <a:bodyPr wrap="none" lIns="0" rIns="0" tIns="0" bIns="0" anchor="ctr">
-            <a:spAutoFit/>
-          </a:bodyPr>
-          <a:lstStyle/>
-          <a:p>
-            <a:pPr algn="l">
-              <a:spcAft>
-                <a:spcPts val="0"/>
-              </a:spcAft>
-            </a:pPr>
-            <a:r>
-              <a:rPr sz="1296" b="0" i="0">
-                <a:solidFill>
-                  <a:srgbClr val="E7F0F3"/>
-                </a:solidFill>
-                <a:latin typeface="Arial"/>
-              </a:rPr>
-              <a:t>p∞</a:t>
-            </a:r>
-          </a:p>
-        </p:txBody>
-      </p:sp>
-      <p:sp>
-        <p:nvSpPr>
-          <p:cNvPr id="22" name="text 20" descr="sci-ppt:obj-020"/>
-          <p:cNvSpPr txBox="1"/>
-          <p:nvPr/>
-        </p:nvSpPr>
-        <p:spPr>
-          <a:xfrm>
-            <a:off x="5266944" y="1682496"/>
-            <a:ext cx="822960" cy="310896"/>
-          </a:xfrm>
-          <a:prstGeom prst="rect">
-            <a:avLst/>
-          </a:prstGeom>
-          <a:noFill/>
-          <a:effectLst/>
-        </p:spPr>
-        <p:txBody>
-          <a:bodyPr wrap="none" lIns="0" rIns="0" tIns="0" bIns="0" anchor="ctr">
-            <a:spAutoFit/>
-          </a:bodyPr>
-          <a:lstStyle/>
-          <a:p>
-            <a:pPr algn="l">
-              <a:spcAft>
-                <a:spcPts val="0"/>
-              </a:spcAft>
-            </a:pPr>
-            <a:r>
-              <a:rPr sz="1296" b="0" i="0">
-                <a:solidFill>
-                  <a:srgbClr val="E7F0F3"/>
-                </a:solidFill>
-                <a:latin typeface="Arial"/>
-              </a:rPr>
-              <a:t>pb</a:t>
-            </a:r>
-          </a:p>
-        </p:txBody>
-      </p:sp>
-      <p:sp>
-        <p:nvSpPr>
-          <p:cNvPr id="23" name="text 21" descr="sci-ppt:obj-021"/>
-          <p:cNvSpPr txBox="1"/>
-          <p:nvPr/>
-        </p:nvSpPr>
-        <p:spPr>
-          <a:xfrm>
-            <a:off x="868680" y="2990088"/>
-            <a:ext cx="7772400" cy="310896"/>
-          </a:xfrm>
-          <a:prstGeom prst="rect">
-            <a:avLst/>
-          </a:prstGeom>
-          <a:noFill/>
-          <a:effectLst/>
-        </p:spPr>
-        <p:txBody>
-          <a:bodyPr wrap="none" lIns="0" rIns="0" tIns="0" bIns="0" anchor="ctr">
-            <a:spAutoFit/>
-          </a:bodyPr>
-          <a:lstStyle/>
-          <a:p>
-            <a:pPr algn="l">
-              <a:spcAft>
-                <a:spcPts val="0"/>
-              </a:spcAft>
-            </a:pPr>
-            <a:r>
-              <a:rPr sz="1152" b="0" i="0">
-                <a:solidFill>
-                  <a:srgbClr val="E7F0F3"/>
-                </a:solidFill>
-                <a:latin typeface="Arial"/>
-              </a:rPr>
-              <a:t>r₀³ − Rref³ = r³ − R³ ; radial coordinates point outward</a:t>
-            </a:r>
-          </a:p>
-        </p:txBody>
-      </p:sp>
-      <p:sp>
-        <p:nvSpPr>
-          <p:cNvPr id="24" name="text 22" descr="sci-ppt:obj-022"/>
-          <p:cNvSpPr txBox="1"/>
-          <p:nvPr/>
-        </p:nvSpPr>
-        <p:spPr>
-          <a:xfrm>
-            <a:off x="256032" y="3465576"/>
-            <a:ext cx="7315200" cy="310896"/>
-          </a:xfrm>
-          <a:prstGeom prst="rect">
-            <a:avLst/>
-          </a:prstGeom>
-          <a:noFill/>
-          <a:effectLst/>
-        </p:spPr>
-        <p:txBody>
-          <a:bodyPr wrap="none" lIns="0" rIns="0" tIns="0" bIns="0" anchor="ctr">
-            <a:spAutoFit/>
-          </a:bodyPr>
-          <a:lstStyle/>
-          <a:p>
-            <a:pPr algn="l">
-              <a:spcAft>
-                <a:spcPts val="0"/>
-              </a:spcAft>
-            </a:pPr>
-            <a:r>
-              <a:rPr sz="1296" b="0" i="0">
-                <a:solidFill>
-                  <a:srgbClr val="8EDBD4"/>
-                </a:solidFill>
-                <a:latin typeface="Arial"/>
-              </a:rPr>
-              <a:t>Variables and physical limits</a:t>
-            </a:r>
-          </a:p>
-        </p:txBody>
-      </p:sp>
-      <p:sp>
-        <p:nvSpPr>
-          <p:cNvPr id="25" name="text 23" descr="sci-ppt:obj-023"/>
-          <p:cNvSpPr txBox="1"/>
-          <p:nvPr/>
-        </p:nvSpPr>
-        <p:spPr>
-          <a:xfrm>
-            <a:off x="365760" y="3813048"/>
-            <a:ext cx="8412480" cy="310896"/>
-          </a:xfrm>
-          <a:prstGeom prst="rect">
-            <a:avLst/>
-          </a:prstGeom>
-          <a:noFill/>
-          <a:effectLst/>
-        </p:spPr>
-        <p:txBody>
-          <a:bodyPr wrap="none" lIns="0" rIns="0" tIns="0" bIns="0" anchor="ctr">
-            <a:spAutoFit/>
-          </a:bodyPr>
-          <a:lstStyle/>
-          <a:p>
-            <a:pPr algn="l">
-              <a:spcAft>
-                <a:spcPts val="0"/>
-              </a:spcAft>
-            </a:pPr>
-            <a:r>
-              <a:rPr sz="1152" b="0" i="0">
-                <a:solidFill>
-                  <a:srgbClr val="E7F0F3"/>
-                </a:solidFill>
-                <a:latin typeface="Arial"/>
-              </a:rPr>
-              <a:t>• pel(R): inward resistance</a:t>
-            </a:r>
-          </a:p>
-        </p:txBody>
-      </p:sp>
-      <p:sp>
-        <p:nvSpPr>
-          <p:cNvPr id="26" name="text 24" descr="sci-ppt:obj-024"/>
-          <p:cNvSpPr txBox="1"/>
-          <p:nvPr/>
-        </p:nvSpPr>
-        <p:spPr>
-          <a:xfrm>
-            <a:off x="365760" y="4023360"/>
-            <a:ext cx="8412480" cy="310896"/>
-          </a:xfrm>
-          <a:prstGeom prst="rect">
-            <a:avLst/>
-          </a:prstGeom>
-          <a:noFill/>
-          <a:effectLst/>
-        </p:spPr>
-        <p:txBody>
-          <a:bodyPr wrap="none" lIns="0" rIns="0" tIns="0" bIns="0" anchor="ctr">
-            <a:spAutoFit/>
-          </a:bodyPr>
-          <a:lstStyle/>
-          <a:p>
-            <a:pPr algn="l">
-              <a:spcAft>
-                <a:spcPts val="0"/>
-              </a:spcAft>
-            </a:pPr>
-            <a:r>
-              <a:rPr sz="1152" b="0" i="0">
-                <a:solidFill>
-                  <a:srgbClr val="E7F0F3"/>
-                </a:solidFill>
-                <a:latin typeface="Arial"/>
-              </a:rPr>
-              <a:t>• Gg: network modulus</a:t>
-            </a:r>
-          </a:p>
-        </p:txBody>
-      </p:sp>
-      <p:sp>
-        <p:nvSpPr>
-          <p:cNvPr id="27" name="text 25" descr="sci-ppt:obj-025"/>
-          <p:cNvSpPr txBox="1"/>
-          <p:nvPr/>
-        </p:nvSpPr>
-        <p:spPr>
-          <a:xfrm>
-            <a:off x="365760" y="4233672"/>
-            <a:ext cx="8412480" cy="310896"/>
-          </a:xfrm>
-          <a:prstGeom prst="rect">
-            <a:avLst/>
-          </a:prstGeom>
-          <a:noFill/>
-          <a:effectLst/>
-        </p:spPr>
-        <p:txBody>
-          <a:bodyPr wrap="none" lIns="0" rIns="0" tIns="0" bIns="0" anchor="ctr">
-            <a:spAutoFit/>
-          </a:bodyPr>
-          <a:lstStyle/>
-          <a:p>
-            <a:pPr algn="l">
-              <a:spcAft>
-                <a:spcPts val="0"/>
-              </a:spcAft>
-            </a:pPr>
-            <a:r>
-              <a:rPr sz="1152" b="0" i="0">
-                <a:solidFill>
-                  <a:srgbClr val="E7F0F3"/>
-                </a:solidFill>
-                <a:latin typeface="Arial"/>
-              </a:rPr>
-              <a:t>• Rref/R: wall stretch inverse</a:t>
-            </a:r>
-          </a:p>
-        </p:txBody>
-      </p:sp>
-      <p:sp>
-        <p:nvSpPr>
-          <p:cNvPr id="28" name="text 26" descr="sci-ppt:obj-026"/>
-          <p:cNvSpPr txBox="1"/>
-          <p:nvPr/>
-        </p:nvSpPr>
-        <p:spPr>
-          <a:xfrm>
-            <a:off x="365760" y="4443984"/>
-            <a:ext cx="8412480" cy="310896"/>
-          </a:xfrm>
-          <a:prstGeom prst="rect">
-            <a:avLst/>
-          </a:prstGeom>
-          <a:noFill/>
-          <a:effectLst/>
-        </p:spPr>
-        <p:txBody>
-          <a:bodyPr wrap="none" lIns="0" rIns="0" tIns="0" bIns="0" anchor="ctr">
-            <a:spAutoFit/>
-          </a:bodyPr>
-          <a:lstStyle/>
-          <a:p>
-            <a:pPr algn="l">
-              <a:spcAft>
-                <a:spcPts val="0"/>
-              </a:spcAft>
-            </a:pPr>
-            <a:r>
-              <a:rPr sz="1152" b="0" i="0">
-                <a:solidFill>
-                  <a:srgbClr val="E7F0F3"/>
-                </a:solidFill>
-                <a:latin typeface="Arial"/>
-              </a:rPr>
-              <a:t>• q: stress-integral coordinate</a:t>
-            </a:r>
-          </a:p>
-        </p:txBody>
-      </p:sp>
-      <p:sp>
-        <p:nvSpPr>
-          <p:cNvPr id="29" name="text 27" descr="sci-ppt:obj-027"/>
-          <p:cNvSpPr txBox="1"/>
-          <p:nvPr/>
-        </p:nvSpPr>
-        <p:spPr>
-          <a:xfrm>
-            <a:off x="365760" y="4654296"/>
-            <a:ext cx="8412480" cy="310896"/>
-          </a:xfrm>
-          <a:prstGeom prst="rect">
-            <a:avLst/>
-          </a:prstGeom>
-          <a:noFill/>
-          <a:effectLst/>
-        </p:spPr>
-        <p:txBody>
-          <a:bodyPr wrap="none" lIns="0" rIns="0" tIns="0" bIns="0" anchor="ctr">
-            <a:spAutoFit/>
-          </a:bodyPr>
-          <a:lstStyle/>
-          <a:p>
-            <a:pPr algn="l">
-              <a:spcAft>
-                <a:spcPts val="0"/>
-              </a:spcAft>
-            </a:pPr>
-            <a:r>
-              <a:rPr sz="1152" b="0" i="0">
-                <a:solidFill>
-                  <a:srgbClr val="E7F0F3"/>
-                </a:solidFill>
-                <a:latin typeface="Arial"/>
-              </a:rPr>
-              <a:t>Integrate 1 and q³ term by term</a:t>
-            </a:r>
-          </a:p>
-        </p:txBody>
-      </p:sp>
-      <p:sp>
-        <p:nvSpPr>
-          <p:cNvPr id="30" name="text 28" descr="sci-ppt:obj-028"/>
-          <p:cNvSpPr txBox="1"/>
-          <p:nvPr/>
-        </p:nvSpPr>
-        <p:spPr>
-          <a:xfrm>
-            <a:off x="365760" y="4864608"/>
-            <a:ext cx="8412480" cy="310896"/>
-          </a:xfrm>
-          <a:prstGeom prst="rect">
-            <a:avLst/>
-          </a:prstGeom>
-          <a:noFill/>
-          <a:effectLst/>
-        </p:spPr>
-        <p:txBody>
-          <a:bodyPr wrap="none" lIns="0" rIns="0" tIns="0" bIns="0" anchor="ctr">
-            <a:spAutoFit/>
-          </a:bodyPr>
-          <a:lstStyle/>
-          <a:p>
-            <a:pPr algn="l">
-              <a:spcAft>
-                <a:spcPts val="0"/>
-              </a:spcAft>
-            </a:pPr>
-            <a:r>
-              <a:rPr sz="1152" b="0" i="0">
-                <a:solidFill>
-                  <a:srgbClr val="E7F0F3"/>
-                </a:solidFill>
-                <a:latin typeface="Arial"/>
-              </a:rPr>
-              <a:t>Constitutive result for an intact infinite network</a:t>
+              <a:t>Neo-Hookean elastic resistance of Eq. A-E05 (curve normalised by G_g).</a:t>
             </a:r>
           </a:p>
         </p:txBody>
